--- a/docs/presentation/小鳥過馬路_Traffic Bird_提案簡報v3.pptx
+++ b/docs/presentation/小鳥過馬路_Traffic Bird_提案簡報v3.pptx
@@ -2,20 +2,21 @@
 <file path=ppt/presentation.xml><?xml version="1.0" encoding="utf-8"?>
 <p:presentation xmlns:p="http://schemas.openxmlformats.org/presentationml/2006/main">
   <p:sldMasterIdLst>
-    <p:sldMasterId xmlns:r="http://schemas.openxmlformats.org/officeDocument/2006/relationships" id="2147483648" r:id="R891fb8741c004365"/>
+    <p:sldMasterId xmlns:r="http://schemas.openxmlformats.org/officeDocument/2006/relationships" id="2147483648" r:id="Rba569a0ec3954fd6"/>
   </p:sldMasterIdLst>
   <p:notesMasterIdLst>
-    <p:notesMasterId xmlns:r="http://schemas.openxmlformats.org/officeDocument/2006/relationships" r:id="Rec862a0ca0c34b28"/>
+    <p:notesMasterId xmlns:r="http://schemas.openxmlformats.org/officeDocument/2006/relationships" r:id="R891ef21848ac4f3b"/>
   </p:notesMasterIdLst>
   <p:sldIdLst>
-    <p:sldId xmlns:r="http://schemas.openxmlformats.org/officeDocument/2006/relationships" id="256" r:id="R79762b233a6b450f"/>
-    <p:sldId xmlns:r="http://schemas.openxmlformats.org/officeDocument/2006/relationships" id="257" r:id="Reb0621c217164e4b"/>
-    <p:sldId xmlns:r="http://schemas.openxmlformats.org/officeDocument/2006/relationships" id="258" r:id="R2429146d8a754006"/>
-    <p:sldId xmlns:r="http://schemas.openxmlformats.org/officeDocument/2006/relationships" id="259" r:id="R020c8fb1df2b4673"/>
-    <p:sldId xmlns:r="http://schemas.openxmlformats.org/officeDocument/2006/relationships" id="260" r:id="R4dcf28f0f5ee479f"/>
-    <p:sldId xmlns:r="http://schemas.openxmlformats.org/officeDocument/2006/relationships" id="261" r:id="R055b45833c6c487b"/>
-    <p:sldId xmlns:r="http://schemas.openxmlformats.org/officeDocument/2006/relationships" id="262" r:id="R35bb0f64090f4d69"/>
-    <p:sldId xmlns:r="http://schemas.openxmlformats.org/officeDocument/2006/relationships" id="263" r:id="Rc1cf5e68991f41c7"/>
+    <p:sldId xmlns:r="http://schemas.openxmlformats.org/officeDocument/2006/relationships" id="256" r:id="R801dfd0767e5411e"/>
+    <p:sldId xmlns:r="http://schemas.openxmlformats.org/officeDocument/2006/relationships" id="257" r:id="R9687a3dabf144413"/>
+    <p:sldId xmlns:r="http://schemas.openxmlformats.org/officeDocument/2006/relationships" id="258" r:id="R10506442d3e74090"/>
+    <p:sldId xmlns:r="http://schemas.openxmlformats.org/officeDocument/2006/relationships" id="259" r:id="R3f73528e6e6d4bca"/>
+    <p:sldId xmlns:r="http://schemas.openxmlformats.org/officeDocument/2006/relationships" id="260" r:id="Re00dcaf679db437b"/>
+    <p:sldId xmlns:r="http://schemas.openxmlformats.org/officeDocument/2006/relationships" id="261" r:id="R6925b0b27f0d442b"/>
+    <p:sldId xmlns:r="http://schemas.openxmlformats.org/officeDocument/2006/relationships" id="262" r:id="R6ce69a3d1280402d"/>
+    <p:sldId xmlns:r="http://schemas.openxmlformats.org/officeDocument/2006/relationships" id="263" r:id="R2f16b193ae124dc3"/>
+    <p:sldId xmlns:r="http://schemas.openxmlformats.org/officeDocument/2006/relationships" id="264" r:id="Rc5f603944ad34937"/>
   </p:sldIdLst>
   <p:sldSz cx="12192000" cy="6858000"/>
   <p:notesSz cx="6858000" cy="9144000"/>
@@ -1029,6 +1030,76 @@
           <a:lstStyle xmlns:a="http://schemas.openxmlformats.org/drawingml/2006/main"/>
           <a:p xmlns:a="http://schemas.openxmlformats.org/drawingml/2006/main">
             <a:r>
+              <a:t>金幣有兩個主要消耗來源：進局前購買一次性輔助，形成每局的小額穩定消耗；以及用金幣補足轉蛋進度，回收既有玩家的大量金幣。玩家主要仍透過對局收集羽毛與提高評價來取得轉蛋進度，最後解鎖外觀收藏，形成持續遊玩的循環。</a:t>
+            </a:r>
+          </a:p>
+        </p:txBody>
+      </p:sp>
+      <p:sp>
+        <p:nvSpPr>
+          <p:cNvPr id="4" name="Slide Number Placeholder 3"/>
+          <p:cNvSpPr>
+            <a:spLocks xmlns:a="http://schemas.openxmlformats.org/drawingml/2006/main" noGrp="1"/>
+          </p:cNvSpPr>
+          <p:nvPr>
+            <p:ph type="sldNum" idx="5"/>
+          </p:nvPr>
+        </p:nvSpPr>
+        <p:spPr/>
+        <p:txBody>
+          <a:bodyPr xmlns:a="http://schemas.openxmlformats.org/drawingml/2006/main"/>
+          <a:lstStyle xmlns:a="http://schemas.openxmlformats.org/drawingml/2006/main"/>
+          <a:p xmlns:a="http://schemas.openxmlformats.org/drawingml/2006/main"/>
+        </p:txBody>
+      </p:sp>
+    </p:spTree>
+  </p:cSld>
+  <p:clrMapOvr>
+    <a:masterClrMapping xmlns:a="http://schemas.openxmlformats.org/drawingml/2006/main"/>
+  </p:clrMapOvr>
+</p:notes>
+</file>
+
+<file path=ppt/notesSlides/notesSlide9.xml><?xml version="1.0" encoding="utf-8"?>
+<p:notes xmlns:p="http://schemas.openxmlformats.org/presentationml/2006/main">
+  <p:cSld>
+    <p:spTree>
+      <p:nvGrpSpPr>
+        <p:cNvPr id="1" name=""/>
+        <p:cNvGrpSpPr/>
+        <p:nvPr/>
+      </p:nvGrpSpPr>
+      <p:grpSpPr>
+        <a:xfrm xmlns:a="http://schemas.openxmlformats.org/drawingml/2006/main"/>
+      </p:grpSpPr>
+      <p:sp>
+        <p:nvSpPr>
+          <p:cNvPr id="2" name="Slide Image Placeholder 1"/>
+          <p:cNvSpPr>
+            <a:spLocks xmlns:a="http://schemas.openxmlformats.org/drawingml/2006/main" noGrp="1"/>
+          </p:cNvSpPr>
+          <p:nvPr>
+            <p:ph type="sldImg" idx="0"/>
+          </p:nvPr>
+        </p:nvSpPr>
+        <p:spPr/>
+      </p:sp>
+      <p:sp>
+        <p:nvSpPr>
+          <p:cNvPr id="3" name="Notes Placeholder 2"/>
+          <p:cNvSpPr>
+            <a:spLocks xmlns:a="http://schemas.openxmlformats.org/drawingml/2006/main" noGrp="1"/>
+          </p:cNvSpPr>
+          <p:nvPr>
+            <p:ph type="body" idx="1"/>
+          </p:nvPr>
+        </p:nvSpPr>
+        <p:spPr/>
+        <p:txBody>
+          <a:bodyPr xmlns:a="http://schemas.openxmlformats.org/drawingml/2006/main"/>
+          <a:lstStyle xmlns:a="http://schemas.openxmlformats.org/drawingml/2006/main"/>
+          <a:p xmlns:a="http://schemas.openxmlformats.org/drawingml/2006/main">
+            <a:r>
               <a:t>資料來源：docs/presentation/提案簡報大綱v3.txt</a:t>
             </a:r>
           </a:p>
@@ -1107,7 +1178,7 @@
   </p:cSld>
   <p:clrMap bg1="lt1" tx1="dk1" bg2="lt2" tx2="dk2" accent1="accent1" accent2="accent2" accent3="accent3" accent4="accent4" accent5="accent5" accent6="accent6" hlink="hlink" folHlink="folHlink"/>
   <p:sldLayoutIdLst>
-    <p:sldLayoutId xmlns:r="http://schemas.openxmlformats.org/officeDocument/2006/relationships" id="2147483649" r:id="R284c460ab76f4c5f"/>
+    <p:sldLayoutId xmlns:r="http://schemas.openxmlformats.org/officeDocument/2006/relationships" id="2147483649" r:id="Rdf1ce58ec676450b"/>
   </p:sldLayoutIdLst>
   <p:txStyles>
     <p:titleStyle>
@@ -1907,6 +1978,7 @@
           <a:lstStyle xmlns:a="http://schemas.openxmlformats.org/drawingml/2006/main"/>
           <a:p xmlns:a="http://schemas.openxmlformats.org/drawingml/2006/main">
             <a:pPr algn="l">
+              <a:buNone/>
               <a:defRPr sz="4050" b="1">
                 <a:solidFill>
                   <a:srgbClr val="17344D"/>
@@ -1964,6 +2036,7 @@
           <a:lstStyle xmlns:a="http://schemas.openxmlformats.org/drawingml/2006/main"/>
           <a:p xmlns:a="http://schemas.openxmlformats.org/drawingml/2006/main">
             <a:pPr algn="l">
+              <a:buNone/>
               <a:defRPr sz="2400" b="1">
                 <a:solidFill>
                   <a:srgbClr val="2F9BD3"/>
@@ -2053,6 +2126,7 @@
           <a:lstStyle xmlns:a="http://schemas.openxmlformats.org/drawingml/2006/main"/>
           <a:p xmlns:a="http://schemas.openxmlformats.org/drawingml/2006/main">
             <a:pPr algn="ctr">
+              <a:buNone/>
               <a:defRPr sz="1575" b="1">
                 <a:solidFill>
                   <a:srgbClr val="17344D"/>
@@ -2110,6 +2184,7 @@
           <a:lstStyle xmlns:a="http://schemas.openxmlformats.org/drawingml/2006/main"/>
           <a:p xmlns:a="http://schemas.openxmlformats.org/drawingml/2006/main">
             <a:pPr algn="l">
+              <a:buNone/>
               <a:defRPr sz="1275" b="0">
                 <a:solidFill>
                   <a:srgbClr val="657784"/>
@@ -2167,6 +2242,7 @@
           <a:lstStyle xmlns:a="http://schemas.openxmlformats.org/drawingml/2006/main"/>
           <a:p xmlns:a="http://schemas.openxmlformats.org/drawingml/2006/main">
             <a:pPr algn="l">
+              <a:buNone/>
               <a:defRPr sz="1350" b="0">
                 <a:solidFill>
                   <a:srgbClr val="263440"/>
@@ -2253,6 +2329,7 @@
           <a:lstStyle xmlns:a="http://schemas.openxmlformats.org/drawingml/2006/main"/>
           <a:p xmlns:a="http://schemas.openxmlformats.org/drawingml/2006/main">
             <a:pPr algn="l">
+              <a:buNone/>
               <a:defRPr sz="2550" b="1">
                 <a:solidFill>
                   <a:srgbClr val="17344D"/>
@@ -2342,6 +2419,7 @@
           <a:lstStyle xmlns:a="http://schemas.openxmlformats.org/drawingml/2006/main"/>
           <a:p xmlns:a="http://schemas.openxmlformats.org/drawingml/2006/main">
             <a:pPr algn="r">
+              <a:buNone/>
               <a:defRPr sz="1200" b="1">
                 <a:solidFill>
                   <a:srgbClr val="2F9BD3"/>
@@ -2429,6 +2507,7 @@
           <a:lstStyle xmlns:a="http://schemas.openxmlformats.org/drawingml/2006/main"/>
           <a:p xmlns:a="http://schemas.openxmlformats.org/drawingml/2006/main">
             <a:pPr algn="ctr">
+              <a:buNone/>
               <a:defRPr sz="1200" b="1">
                 <a:solidFill>
                   <a:srgbClr val="17344D"/>
@@ -2486,6 +2565,7 @@
           <a:lstStyle xmlns:a="http://schemas.openxmlformats.org/drawingml/2006/main"/>
           <a:p xmlns:a="http://schemas.openxmlformats.org/drawingml/2006/main">
             <a:pPr algn="l">
+              <a:buNone/>
               <a:defRPr sz="1875" b="0">
                 <a:solidFill>
                   <a:srgbClr val="17344D"/>
@@ -2604,6 +2684,7 @@
           <a:lstStyle xmlns:a="http://schemas.openxmlformats.org/drawingml/2006/main"/>
           <a:p xmlns:a="http://schemas.openxmlformats.org/drawingml/2006/main">
             <a:pPr algn="ctr">
+              <a:buNone/>
               <a:defRPr sz="1200" b="1">
                 <a:solidFill>
                   <a:srgbClr val="17344D"/>
@@ -2661,6 +2742,7 @@
           <a:lstStyle xmlns:a="http://schemas.openxmlformats.org/drawingml/2006/main"/>
           <a:p xmlns:a="http://schemas.openxmlformats.org/drawingml/2006/main">
             <a:pPr algn="l">
+              <a:buNone/>
               <a:defRPr sz="1875" b="1">
                 <a:solidFill>
                   <a:srgbClr val="17344D"/>
@@ -2779,6 +2861,7 @@
           <a:lstStyle xmlns:a="http://schemas.openxmlformats.org/drawingml/2006/main"/>
           <a:p xmlns:a="http://schemas.openxmlformats.org/drawingml/2006/main">
             <a:pPr algn="ctr">
+              <a:buNone/>
               <a:defRPr sz="1200" b="1">
                 <a:solidFill>
                   <a:srgbClr val="17344D"/>
@@ -2836,6 +2919,7 @@
           <a:lstStyle xmlns:a="http://schemas.openxmlformats.org/drawingml/2006/main"/>
           <a:p xmlns:a="http://schemas.openxmlformats.org/drawingml/2006/main">
             <a:pPr algn="l">
+              <a:buNone/>
               <a:defRPr sz="1875" b="0">
                 <a:solidFill>
                   <a:srgbClr val="17344D"/>
@@ -2954,6 +3038,7 @@
           <a:lstStyle xmlns:a="http://schemas.openxmlformats.org/drawingml/2006/main"/>
           <a:p xmlns:a="http://schemas.openxmlformats.org/drawingml/2006/main">
             <a:pPr algn="ctr">
+              <a:buNone/>
               <a:defRPr sz="1200" b="1">
                 <a:solidFill>
                   <a:srgbClr val="17344D"/>
@@ -3011,6 +3096,7 @@
           <a:lstStyle xmlns:a="http://schemas.openxmlformats.org/drawingml/2006/main"/>
           <a:p xmlns:a="http://schemas.openxmlformats.org/drawingml/2006/main">
             <a:pPr algn="l">
+              <a:buNone/>
               <a:defRPr sz="1875" b="0">
                 <a:solidFill>
                   <a:srgbClr val="17344D"/>
@@ -3129,6 +3215,7 @@
           <a:lstStyle xmlns:a="http://schemas.openxmlformats.org/drawingml/2006/main"/>
           <a:p xmlns:a="http://schemas.openxmlformats.org/drawingml/2006/main">
             <a:pPr algn="ctr">
+              <a:buNone/>
               <a:defRPr sz="1200" b="1">
                 <a:solidFill>
                   <a:srgbClr val="17344D"/>
@@ -3186,6 +3273,7 @@
           <a:lstStyle xmlns:a="http://schemas.openxmlformats.org/drawingml/2006/main"/>
           <a:p xmlns:a="http://schemas.openxmlformats.org/drawingml/2006/main">
             <a:pPr algn="l">
+              <a:buNone/>
               <a:defRPr sz="1875" b="0">
                 <a:solidFill>
                   <a:srgbClr val="17344D"/>
@@ -3306,6 +3394,7 @@
           <a:lstStyle xmlns:a="http://schemas.openxmlformats.org/drawingml/2006/main"/>
           <a:p xmlns:a="http://schemas.openxmlformats.org/drawingml/2006/main">
             <a:pPr algn="ctr">
+              <a:buNone/>
               <a:defRPr sz="2100" b="1">
                 <a:solidFill>
                   <a:srgbClr val="2F9BD3"/>
@@ -3329,6 +3418,7 @@
           </a:p>
           <a:p xmlns:a="http://schemas.openxmlformats.org/drawingml/2006/main">
             <a:pPr algn="ctr">
+              <a:buNone/>
               <a:defRPr sz="2100" b="1">
                 <a:solidFill>
                   <a:srgbClr val="2F9BD3"/>
@@ -3386,6 +3476,7 @@
           <a:lstStyle xmlns:a="http://schemas.openxmlformats.org/drawingml/2006/main"/>
           <a:p xmlns:a="http://schemas.openxmlformats.org/drawingml/2006/main">
             <a:pPr algn="ctr">
+              <a:buNone/>
               <a:defRPr sz="1125" b="0">
                 <a:solidFill>
                   <a:srgbClr val="657784"/>
@@ -3474,6 +3565,7 @@
           <a:lstStyle xmlns:a="http://schemas.openxmlformats.org/drawingml/2006/main"/>
           <a:p xmlns:a="http://schemas.openxmlformats.org/drawingml/2006/main">
             <a:pPr algn="l">
+              <a:buNone/>
               <a:defRPr sz="825" b="0">
                 <a:solidFill>
                   <a:srgbClr val="657784"/>
@@ -3531,6 +3623,7 @@
           <a:lstStyle xmlns:a="http://schemas.openxmlformats.org/drawingml/2006/main"/>
           <a:p xmlns:a="http://schemas.openxmlformats.org/drawingml/2006/main">
             <a:pPr algn="r">
+              <a:buNone/>
               <a:defRPr sz="825" b="0">
                 <a:solidFill>
                   <a:srgbClr val="657784"/>
@@ -3617,6 +3710,7 @@
           <a:lstStyle xmlns:a="http://schemas.openxmlformats.org/drawingml/2006/main"/>
           <a:p xmlns:a="http://schemas.openxmlformats.org/drawingml/2006/main">
             <a:pPr algn="l">
+              <a:buNone/>
               <a:defRPr sz="2550" b="1">
                 <a:solidFill>
                   <a:srgbClr val="17344D"/>
@@ -3706,6 +3800,7 @@
           <a:lstStyle xmlns:a="http://schemas.openxmlformats.org/drawingml/2006/main"/>
           <a:p xmlns:a="http://schemas.openxmlformats.org/drawingml/2006/main">
             <a:pPr algn="r">
+              <a:buNone/>
               <a:defRPr sz="1200" b="1">
                 <a:solidFill>
                   <a:srgbClr val="2F9BD3"/>
@@ -3828,6 +3923,7 @@
           <a:lstStyle xmlns:a="http://schemas.openxmlformats.org/drawingml/2006/main"/>
           <a:p xmlns:a="http://schemas.openxmlformats.org/drawingml/2006/main">
             <a:pPr algn="ctr">
+              <a:buNone/>
               <a:defRPr sz="1050" b="1">
                 <a:solidFill>
                   <a:srgbClr val="2F9BD3"/>
@@ -3885,6 +3981,7 @@
           <a:lstStyle xmlns:a="http://schemas.openxmlformats.org/drawingml/2006/main"/>
           <a:p xmlns:a="http://schemas.openxmlformats.org/drawingml/2006/main">
             <a:pPr algn="l">
+              <a:buNone/>
               <a:defRPr sz="1500" b="1">
                 <a:solidFill>
                   <a:srgbClr val="17344D"/>
@@ -3942,6 +4039,7 @@
           <a:lstStyle xmlns:a="http://schemas.openxmlformats.org/drawingml/2006/main"/>
           <a:p xmlns:a="http://schemas.openxmlformats.org/drawingml/2006/main">
             <a:pPr algn="l">
+              <a:buNone/>
               <a:defRPr sz="1125" b="0">
                 <a:solidFill>
                   <a:srgbClr val="657784"/>
@@ -4064,6 +4162,7 @@
           <a:lstStyle xmlns:a="http://schemas.openxmlformats.org/drawingml/2006/main"/>
           <a:p xmlns:a="http://schemas.openxmlformats.org/drawingml/2006/main">
             <a:pPr algn="ctr">
+              <a:buNone/>
               <a:defRPr sz="1050" b="1">
                 <a:solidFill>
                   <a:srgbClr val="2F9BD3"/>
@@ -4121,6 +4220,7 @@
           <a:lstStyle xmlns:a="http://schemas.openxmlformats.org/drawingml/2006/main"/>
           <a:p xmlns:a="http://schemas.openxmlformats.org/drawingml/2006/main">
             <a:pPr algn="l">
+              <a:buNone/>
               <a:defRPr sz="1500" b="1">
                 <a:solidFill>
                   <a:srgbClr val="17344D"/>
@@ -4178,6 +4278,7 @@
           <a:lstStyle xmlns:a="http://schemas.openxmlformats.org/drawingml/2006/main"/>
           <a:p xmlns:a="http://schemas.openxmlformats.org/drawingml/2006/main">
             <a:pPr algn="l">
+              <a:buNone/>
               <a:defRPr sz="1125" b="0">
                 <a:solidFill>
                   <a:srgbClr val="657784"/>
@@ -4270,6 +4371,7 @@
           <a:lstStyle xmlns:a="http://schemas.openxmlformats.org/drawingml/2006/main"/>
           <a:p xmlns:a="http://schemas.openxmlformats.org/drawingml/2006/main">
             <a:pPr algn="l">
+              <a:buNone/>
               <a:defRPr sz="1350" b="1">
                 <a:solidFill>
                   <a:srgbClr val="17344D"/>
@@ -4327,6 +4429,7 @@
           <a:lstStyle xmlns:a="http://schemas.openxmlformats.org/drawingml/2006/main"/>
           <a:p xmlns:a="http://schemas.openxmlformats.org/drawingml/2006/main">
             <a:pPr algn="ctr">
+              <a:buNone/>
               <a:defRPr sz="1275" b="1">
                 <a:solidFill>
                   <a:srgbClr val="2F9BD3"/>
@@ -4451,6 +4554,7 @@
           <a:lstStyle xmlns:a="http://schemas.openxmlformats.org/drawingml/2006/main"/>
           <a:p xmlns:a="http://schemas.openxmlformats.org/drawingml/2006/main">
             <a:pPr algn="ctr">
+              <a:buNone/>
               <a:defRPr sz="1350" b="1">
                 <a:solidFill>
                   <a:srgbClr val="FFFFFF"/>
@@ -4538,6 +4642,7 @@
           <a:lstStyle xmlns:a="http://schemas.openxmlformats.org/drawingml/2006/main"/>
           <a:p xmlns:a="http://schemas.openxmlformats.org/drawingml/2006/main">
             <a:pPr algn="ctr">
+              <a:buNone/>
               <a:defRPr sz="3450" b="1">
                 <a:solidFill>
                   <a:srgbClr val="17344D"/>
@@ -4595,6 +4700,7 @@
           <a:lstStyle xmlns:a="http://schemas.openxmlformats.org/drawingml/2006/main"/>
           <a:p xmlns:a="http://schemas.openxmlformats.org/drawingml/2006/main">
             <a:pPr algn="ctr">
+              <a:buNone/>
               <a:defRPr sz="1500" b="1">
                 <a:solidFill>
                   <a:srgbClr val="17344D"/>
@@ -4652,6 +4758,7 @@
           <a:lstStyle xmlns:a="http://schemas.openxmlformats.org/drawingml/2006/main"/>
           <a:p xmlns:a="http://schemas.openxmlformats.org/drawingml/2006/main">
             <a:pPr algn="ctr">
+              <a:buNone/>
               <a:defRPr sz="1050" b="0">
                 <a:solidFill>
                   <a:srgbClr val="657784"/>
@@ -4675,6 +4782,7 @@
           </a:p>
           <a:p xmlns:a="http://schemas.openxmlformats.org/drawingml/2006/main">
             <a:pPr algn="ctr">
+              <a:buNone/>
               <a:defRPr sz="1050" b="0">
                 <a:solidFill>
                   <a:srgbClr val="657784"/>
@@ -4764,6 +4872,7 @@
           <a:lstStyle xmlns:a="http://schemas.openxmlformats.org/drawingml/2006/main"/>
           <a:p xmlns:a="http://schemas.openxmlformats.org/drawingml/2006/main">
             <a:pPr algn="ctr">
+              <a:buNone/>
               <a:defRPr sz="1575" b="1">
                 <a:solidFill>
                   <a:srgbClr val="17344D"/>
@@ -4852,6 +4961,7 @@
           <a:lstStyle xmlns:a="http://schemas.openxmlformats.org/drawingml/2006/main"/>
           <a:p xmlns:a="http://schemas.openxmlformats.org/drawingml/2006/main">
             <a:pPr algn="l">
+              <a:buNone/>
               <a:defRPr sz="825" b="0">
                 <a:solidFill>
                   <a:srgbClr val="657784"/>
@@ -4909,6 +5019,7 @@
           <a:lstStyle xmlns:a="http://schemas.openxmlformats.org/drawingml/2006/main"/>
           <a:p xmlns:a="http://schemas.openxmlformats.org/drawingml/2006/main">
             <a:pPr algn="r">
+              <a:buNone/>
               <a:defRPr sz="825" b="0">
                 <a:solidFill>
                   <a:srgbClr val="657784"/>
@@ -4995,6 +5106,7 @@
           <a:lstStyle xmlns:a="http://schemas.openxmlformats.org/drawingml/2006/main"/>
           <a:p xmlns:a="http://schemas.openxmlformats.org/drawingml/2006/main">
             <a:pPr algn="l">
+              <a:buNone/>
               <a:defRPr sz="2550" b="1">
                 <a:solidFill>
                   <a:srgbClr val="17344D"/>
@@ -5084,6 +5196,7 @@
           <a:lstStyle xmlns:a="http://schemas.openxmlformats.org/drawingml/2006/main"/>
           <a:p xmlns:a="http://schemas.openxmlformats.org/drawingml/2006/main">
             <a:pPr algn="r">
+              <a:buNone/>
               <a:defRPr sz="1200" b="1">
                 <a:solidFill>
                   <a:srgbClr val="2F9BD3"/>
@@ -5206,6 +5319,7 @@
           <a:lstStyle xmlns:a="http://schemas.openxmlformats.org/drawingml/2006/main"/>
           <a:p xmlns:a="http://schemas.openxmlformats.org/drawingml/2006/main">
             <a:pPr algn="ctr">
+              <a:buNone/>
               <a:defRPr sz="1050" b="1">
                 <a:solidFill>
                   <a:srgbClr val="2F9BD3"/>
@@ -5263,6 +5377,7 @@
           <a:lstStyle xmlns:a="http://schemas.openxmlformats.org/drawingml/2006/main"/>
           <a:p xmlns:a="http://schemas.openxmlformats.org/drawingml/2006/main">
             <a:pPr algn="l">
+              <a:buNone/>
               <a:defRPr sz="1500" b="1">
                 <a:solidFill>
                   <a:srgbClr val="17344D"/>
@@ -5320,6 +5435,7 @@
           <a:lstStyle xmlns:a="http://schemas.openxmlformats.org/drawingml/2006/main"/>
           <a:p xmlns:a="http://schemas.openxmlformats.org/drawingml/2006/main">
             <a:pPr algn="l">
+              <a:buNone/>
               <a:defRPr sz="1125" b="0">
                 <a:solidFill>
                   <a:srgbClr val="657784"/>
@@ -5442,6 +5558,7 @@
           <a:lstStyle xmlns:a="http://schemas.openxmlformats.org/drawingml/2006/main"/>
           <a:p xmlns:a="http://schemas.openxmlformats.org/drawingml/2006/main">
             <a:pPr algn="ctr">
+              <a:buNone/>
               <a:defRPr sz="1050" b="1">
                 <a:solidFill>
                   <a:srgbClr val="2F9BD3"/>
@@ -5499,6 +5616,7 @@
           <a:lstStyle xmlns:a="http://schemas.openxmlformats.org/drawingml/2006/main"/>
           <a:p xmlns:a="http://schemas.openxmlformats.org/drawingml/2006/main">
             <a:pPr algn="l">
+              <a:buNone/>
               <a:defRPr sz="1500" b="1">
                 <a:solidFill>
                   <a:srgbClr val="17344D"/>
@@ -5556,6 +5674,7 @@
           <a:lstStyle xmlns:a="http://schemas.openxmlformats.org/drawingml/2006/main"/>
           <a:p xmlns:a="http://schemas.openxmlformats.org/drawingml/2006/main">
             <a:pPr algn="l">
+              <a:buNone/>
               <a:defRPr sz="1125" b="0">
                 <a:solidFill>
                   <a:srgbClr val="657784"/>
@@ -5678,6 +5797,7 @@
           <a:lstStyle xmlns:a="http://schemas.openxmlformats.org/drawingml/2006/main"/>
           <a:p xmlns:a="http://schemas.openxmlformats.org/drawingml/2006/main">
             <a:pPr algn="ctr">
+              <a:buNone/>
               <a:defRPr sz="1050" b="1">
                 <a:solidFill>
                   <a:srgbClr val="2F9BD3"/>
@@ -5735,6 +5855,7 @@
           <a:lstStyle xmlns:a="http://schemas.openxmlformats.org/drawingml/2006/main"/>
           <a:p xmlns:a="http://schemas.openxmlformats.org/drawingml/2006/main">
             <a:pPr algn="l">
+              <a:buNone/>
               <a:defRPr sz="1500" b="1">
                 <a:solidFill>
                   <a:srgbClr val="17344D"/>
@@ -5792,6 +5913,7 @@
           <a:lstStyle xmlns:a="http://schemas.openxmlformats.org/drawingml/2006/main"/>
           <a:p xmlns:a="http://schemas.openxmlformats.org/drawingml/2006/main">
             <a:pPr algn="l">
+              <a:buNone/>
               <a:defRPr sz="1125" b="0">
                 <a:solidFill>
                   <a:srgbClr val="657784"/>
@@ -5914,6 +6036,7 @@
           <a:lstStyle xmlns:a="http://schemas.openxmlformats.org/drawingml/2006/main"/>
           <a:p xmlns:a="http://schemas.openxmlformats.org/drawingml/2006/main">
             <a:pPr algn="ctr">
+              <a:buNone/>
               <a:defRPr sz="1050" b="1">
                 <a:solidFill>
                   <a:srgbClr val="2F9BD3"/>
@@ -5971,6 +6094,7 @@
           <a:lstStyle xmlns:a="http://schemas.openxmlformats.org/drawingml/2006/main"/>
           <a:p xmlns:a="http://schemas.openxmlformats.org/drawingml/2006/main">
             <a:pPr algn="l">
+              <a:buNone/>
               <a:defRPr sz="1500" b="1">
                 <a:solidFill>
                   <a:srgbClr val="17344D"/>
@@ -6028,6 +6152,7 @@
           <a:lstStyle xmlns:a="http://schemas.openxmlformats.org/drawingml/2006/main"/>
           <a:p xmlns:a="http://schemas.openxmlformats.org/drawingml/2006/main">
             <a:pPr algn="l">
+              <a:buNone/>
               <a:defRPr sz="1125" b="0">
                 <a:solidFill>
                   <a:srgbClr val="657784"/>
@@ -6085,6 +6210,7 @@
           <a:lstStyle xmlns:a="http://schemas.openxmlformats.org/drawingml/2006/main"/>
           <a:p xmlns:a="http://schemas.openxmlformats.org/drawingml/2006/main">
             <a:pPr algn="ctr">
+              <a:buNone/>
               <a:defRPr sz="1650" b="1">
                 <a:solidFill>
                   <a:srgbClr val="17344D"/>
@@ -6177,6 +6303,7 @@
           <a:lstStyle xmlns:a="http://schemas.openxmlformats.org/drawingml/2006/main"/>
           <a:p xmlns:a="http://schemas.openxmlformats.org/drawingml/2006/main">
             <a:pPr algn="ctr">
+              <a:buNone/>
               <a:defRPr sz="1200" b="1">
                 <a:solidFill>
                   <a:srgbClr val="17344D"/>
@@ -6234,6 +6361,7 @@
           <a:lstStyle xmlns:a="http://schemas.openxmlformats.org/drawingml/2006/main"/>
           <a:p xmlns:a="http://schemas.openxmlformats.org/drawingml/2006/main">
             <a:pPr algn="ctr">
+              <a:buNone/>
               <a:defRPr sz="900" b="0">
                 <a:solidFill>
                   <a:srgbClr val="657784"/>
@@ -6326,6 +6454,7 @@
           <a:lstStyle xmlns:a="http://schemas.openxmlformats.org/drawingml/2006/main"/>
           <a:p xmlns:a="http://schemas.openxmlformats.org/drawingml/2006/main">
             <a:pPr algn="ctr">
+              <a:buNone/>
               <a:defRPr sz="1200" b="1">
                 <a:solidFill>
                   <a:srgbClr val="17344D"/>
@@ -6383,6 +6512,7 @@
           <a:lstStyle xmlns:a="http://schemas.openxmlformats.org/drawingml/2006/main"/>
           <a:p xmlns:a="http://schemas.openxmlformats.org/drawingml/2006/main">
             <a:pPr algn="ctr">
+              <a:buNone/>
               <a:defRPr sz="900" b="0">
                 <a:solidFill>
                   <a:srgbClr val="657784"/>
@@ -6475,6 +6605,7 @@
           <a:lstStyle xmlns:a="http://schemas.openxmlformats.org/drawingml/2006/main"/>
           <a:p xmlns:a="http://schemas.openxmlformats.org/drawingml/2006/main">
             <a:pPr algn="ctr">
+              <a:buNone/>
               <a:defRPr sz="1200" b="1">
                 <a:solidFill>
                   <a:srgbClr val="17344D"/>
@@ -6532,6 +6663,7 @@
           <a:lstStyle xmlns:a="http://schemas.openxmlformats.org/drawingml/2006/main"/>
           <a:p xmlns:a="http://schemas.openxmlformats.org/drawingml/2006/main">
             <a:pPr algn="ctr">
+              <a:buNone/>
               <a:defRPr sz="900" b="0">
                 <a:solidFill>
                   <a:srgbClr val="657784"/>
@@ -6624,6 +6756,7 @@
           <a:lstStyle xmlns:a="http://schemas.openxmlformats.org/drawingml/2006/main"/>
           <a:p xmlns:a="http://schemas.openxmlformats.org/drawingml/2006/main">
             <a:pPr algn="ctr">
+              <a:buNone/>
               <a:defRPr sz="1200" b="1">
                 <a:solidFill>
                   <a:srgbClr val="17344D"/>
@@ -6681,6 +6814,7 @@
           <a:lstStyle xmlns:a="http://schemas.openxmlformats.org/drawingml/2006/main"/>
           <a:p xmlns:a="http://schemas.openxmlformats.org/drawingml/2006/main">
             <a:pPr algn="ctr">
+              <a:buNone/>
               <a:defRPr sz="900" b="0">
                 <a:solidFill>
                   <a:srgbClr val="657784"/>
@@ -6773,6 +6907,7 @@
           <a:lstStyle xmlns:a="http://schemas.openxmlformats.org/drawingml/2006/main"/>
           <a:p xmlns:a="http://schemas.openxmlformats.org/drawingml/2006/main">
             <a:pPr algn="ctr">
+              <a:buNone/>
               <a:defRPr sz="1200" b="1">
                 <a:solidFill>
                   <a:srgbClr val="17344D"/>
@@ -6830,6 +6965,7 @@
           <a:lstStyle xmlns:a="http://schemas.openxmlformats.org/drawingml/2006/main"/>
           <a:p xmlns:a="http://schemas.openxmlformats.org/drawingml/2006/main">
             <a:pPr algn="ctr">
+              <a:buNone/>
               <a:defRPr sz="900" b="0">
                 <a:solidFill>
                   <a:srgbClr val="657784"/>
@@ -6920,6 +7056,7 @@
           <a:lstStyle xmlns:a="http://schemas.openxmlformats.org/drawingml/2006/main"/>
           <a:p xmlns:a="http://schemas.openxmlformats.org/drawingml/2006/main">
             <a:pPr algn="ctr">
+              <a:buNone/>
               <a:defRPr sz="1500" b="1">
                 <a:solidFill>
                   <a:srgbClr val="17344D"/>
@@ -6943,6 +7080,7 @@
           </a:p>
           <a:p xmlns:a="http://schemas.openxmlformats.org/drawingml/2006/main">
             <a:pPr algn="ctr">
+              <a:buNone/>
               <a:defRPr sz="1500" b="1">
                 <a:solidFill>
                   <a:srgbClr val="17344D"/>
@@ -6968,7 +7106,7 @@
       </p:sp>
       <p:cxnSp>
         <p:nvCxnSpPr>
-          <p:cNvPr id="91" name=""/>
+          <p:cNvPr id="137" name=""/>
           <p:cNvCxnSpPr>
             <a:stCxn xmlns:a="http://schemas.openxmlformats.org/drawingml/2006/main" id="25" idx="3"/>
             <a:endCxn xmlns:a="http://schemas.openxmlformats.org/drawingml/2006/main" id="28" idx="1"/>
@@ -6996,7 +7134,7 @@
       </p:cxnSp>
       <p:cxnSp>
         <p:nvCxnSpPr>
-          <p:cNvPr id="92" name=""/>
+          <p:cNvPr id="138" name=""/>
           <p:cNvCxnSpPr>
             <a:stCxn xmlns:a="http://schemas.openxmlformats.org/drawingml/2006/main" id="28" idx="2"/>
             <a:endCxn xmlns:a="http://schemas.openxmlformats.org/drawingml/2006/main" id="31" idx="0"/>
@@ -7024,7 +7162,7 @@
       </p:cxnSp>
       <p:cxnSp>
         <p:nvCxnSpPr>
-          <p:cNvPr id="93" name=""/>
+          <p:cNvPr id="139" name=""/>
           <p:cNvCxnSpPr>
             <a:stCxn xmlns:a="http://schemas.openxmlformats.org/drawingml/2006/main" id="31" idx="1"/>
             <a:endCxn xmlns:a="http://schemas.openxmlformats.org/drawingml/2006/main" id="34" idx="3"/>
@@ -7052,7 +7190,7 @@
       </p:cxnSp>
       <p:cxnSp>
         <p:nvCxnSpPr>
-          <p:cNvPr id="94" name=""/>
+          <p:cNvPr id="140" name=""/>
           <p:cNvCxnSpPr>
             <a:stCxn xmlns:a="http://schemas.openxmlformats.org/drawingml/2006/main" id="34" idx="1"/>
             <a:endCxn xmlns:a="http://schemas.openxmlformats.org/drawingml/2006/main" id="37" idx="2"/>
@@ -7080,7 +7218,7 @@
       </p:cxnSp>
       <p:cxnSp>
         <p:nvCxnSpPr>
-          <p:cNvPr id="95" name=""/>
+          <p:cNvPr id="141" name=""/>
           <p:cNvCxnSpPr>
             <a:stCxn xmlns:a="http://schemas.openxmlformats.org/drawingml/2006/main" id="37" idx="0"/>
             <a:endCxn xmlns:a="http://schemas.openxmlformats.org/drawingml/2006/main" id="25" idx="1"/>
@@ -7171,6 +7309,7 @@
           <a:lstStyle xmlns:a="http://schemas.openxmlformats.org/drawingml/2006/main"/>
           <a:p xmlns:a="http://schemas.openxmlformats.org/drawingml/2006/main">
             <a:pPr algn="l">
+              <a:buNone/>
               <a:defRPr sz="825" b="0">
                 <a:solidFill>
                   <a:srgbClr val="657784"/>
@@ -7228,6 +7367,7 @@
           <a:lstStyle xmlns:a="http://schemas.openxmlformats.org/drawingml/2006/main"/>
           <a:p xmlns:a="http://schemas.openxmlformats.org/drawingml/2006/main">
             <a:pPr algn="r">
+              <a:buNone/>
               <a:defRPr sz="825" b="0">
                 <a:solidFill>
                   <a:srgbClr val="657784"/>
@@ -7314,6 +7454,7 @@
           <a:lstStyle xmlns:a="http://schemas.openxmlformats.org/drawingml/2006/main"/>
           <a:p xmlns:a="http://schemas.openxmlformats.org/drawingml/2006/main">
             <a:pPr algn="l">
+              <a:buNone/>
               <a:defRPr sz="2550" b="1">
                 <a:solidFill>
                   <a:srgbClr val="17344D"/>
@@ -7403,6 +7544,7 @@
           <a:lstStyle xmlns:a="http://schemas.openxmlformats.org/drawingml/2006/main"/>
           <a:p xmlns:a="http://schemas.openxmlformats.org/drawingml/2006/main">
             <a:pPr algn="r">
+              <a:buNone/>
               <a:defRPr sz="1200" b="1">
                 <a:solidFill>
                   <a:srgbClr val="2F9BD3"/>
@@ -7525,6 +7667,7 @@
           <a:lstStyle xmlns:a="http://schemas.openxmlformats.org/drawingml/2006/main"/>
           <a:p xmlns:a="http://schemas.openxmlformats.org/drawingml/2006/main">
             <a:pPr algn="ctr">
+              <a:buNone/>
               <a:defRPr sz="1875" b="1">
                 <a:solidFill>
                   <a:srgbClr val="17344D"/>
@@ -7582,6 +7725,7 @@
           <a:lstStyle xmlns:a="http://schemas.openxmlformats.org/drawingml/2006/main"/>
           <a:p xmlns:a="http://schemas.openxmlformats.org/drawingml/2006/main">
             <a:pPr algn="ctr">
+              <a:buNone/>
               <a:defRPr sz="1800" b="1">
                 <a:solidFill>
                   <a:srgbClr val="17344D"/>
@@ -7639,6 +7783,7 @@
           <a:lstStyle xmlns:a="http://schemas.openxmlformats.org/drawingml/2006/main"/>
           <a:p xmlns:a="http://schemas.openxmlformats.org/drawingml/2006/main">
             <a:pPr algn="ctr">
+              <a:buNone/>
               <a:defRPr sz="1200" b="1">
                 <a:solidFill>
                   <a:srgbClr val="2F9BD3"/>
@@ -7696,6 +7841,7 @@
           <a:lstStyle xmlns:a="http://schemas.openxmlformats.org/drawingml/2006/main"/>
           <a:p xmlns:a="http://schemas.openxmlformats.org/drawingml/2006/main">
             <a:pPr algn="ctr">
+              <a:buNone/>
               <a:defRPr sz="1050" b="0">
                 <a:solidFill>
                   <a:srgbClr val="657784"/>
@@ -7818,6 +7964,7 @@
           <a:lstStyle xmlns:a="http://schemas.openxmlformats.org/drawingml/2006/main"/>
           <a:p xmlns:a="http://schemas.openxmlformats.org/drawingml/2006/main">
             <a:pPr algn="ctr">
+              <a:buNone/>
               <a:defRPr sz="1875" b="1">
                 <a:solidFill>
                   <a:srgbClr val="17344D"/>
@@ -7875,6 +8022,7 @@
           <a:lstStyle xmlns:a="http://schemas.openxmlformats.org/drawingml/2006/main"/>
           <a:p xmlns:a="http://schemas.openxmlformats.org/drawingml/2006/main">
             <a:pPr algn="ctr">
+              <a:buNone/>
               <a:defRPr sz="1800" b="1">
                 <a:solidFill>
                   <a:srgbClr val="17344D"/>
@@ -7932,6 +8080,7 @@
           <a:lstStyle xmlns:a="http://schemas.openxmlformats.org/drawingml/2006/main"/>
           <a:p xmlns:a="http://schemas.openxmlformats.org/drawingml/2006/main">
             <a:pPr algn="ctr">
+              <a:buNone/>
               <a:defRPr sz="1200" b="1">
                 <a:solidFill>
                   <a:srgbClr val="2F9BD3"/>
@@ -7989,6 +8138,7 @@
           <a:lstStyle xmlns:a="http://schemas.openxmlformats.org/drawingml/2006/main"/>
           <a:p xmlns:a="http://schemas.openxmlformats.org/drawingml/2006/main">
             <a:pPr algn="ctr">
+              <a:buNone/>
               <a:defRPr sz="1050" b="0">
                 <a:solidFill>
                   <a:srgbClr val="657784"/>
@@ -8111,6 +8261,7 @@
           <a:lstStyle xmlns:a="http://schemas.openxmlformats.org/drawingml/2006/main"/>
           <a:p xmlns:a="http://schemas.openxmlformats.org/drawingml/2006/main">
             <a:pPr algn="ctr">
+              <a:buNone/>
               <a:defRPr sz="1875" b="1">
                 <a:solidFill>
                   <a:srgbClr val="17344D"/>
@@ -8168,6 +8319,7 @@
           <a:lstStyle xmlns:a="http://schemas.openxmlformats.org/drawingml/2006/main"/>
           <a:p xmlns:a="http://schemas.openxmlformats.org/drawingml/2006/main">
             <a:pPr algn="ctr">
+              <a:buNone/>
               <a:defRPr sz="1800" b="1">
                 <a:solidFill>
                   <a:srgbClr val="17344D"/>
@@ -8225,6 +8377,7 @@
           <a:lstStyle xmlns:a="http://schemas.openxmlformats.org/drawingml/2006/main"/>
           <a:p xmlns:a="http://schemas.openxmlformats.org/drawingml/2006/main">
             <a:pPr algn="ctr">
+              <a:buNone/>
               <a:defRPr sz="1200" b="1">
                 <a:solidFill>
                   <a:srgbClr val="2F9BD3"/>
@@ -8282,6 +8435,7 @@
           <a:lstStyle xmlns:a="http://schemas.openxmlformats.org/drawingml/2006/main"/>
           <a:p xmlns:a="http://schemas.openxmlformats.org/drawingml/2006/main">
             <a:pPr algn="ctr">
+              <a:buNone/>
               <a:defRPr sz="1050" b="0">
                 <a:solidFill>
                   <a:srgbClr val="657784"/>
@@ -8371,6 +8525,7 @@
           <a:lstStyle xmlns:a="http://schemas.openxmlformats.org/drawingml/2006/main"/>
           <a:p xmlns:a="http://schemas.openxmlformats.org/drawingml/2006/main">
             <a:pPr algn="ctr">
+              <a:buNone/>
               <a:defRPr sz="1650" b="1">
                 <a:solidFill>
                   <a:srgbClr val="17344D"/>
@@ -8459,6 +8614,7 @@
           <a:lstStyle xmlns:a="http://schemas.openxmlformats.org/drawingml/2006/main"/>
           <a:p xmlns:a="http://schemas.openxmlformats.org/drawingml/2006/main">
             <a:pPr algn="l">
+              <a:buNone/>
               <a:defRPr sz="825" b="0">
                 <a:solidFill>
                   <a:srgbClr val="657784"/>
@@ -8516,6 +8672,7 @@
           <a:lstStyle xmlns:a="http://schemas.openxmlformats.org/drawingml/2006/main"/>
           <a:p xmlns:a="http://schemas.openxmlformats.org/drawingml/2006/main">
             <a:pPr algn="r">
+              <a:buNone/>
               <a:defRPr sz="825" b="0">
                 <a:solidFill>
                   <a:srgbClr val="657784"/>
@@ -8602,6 +8759,7 @@
           <a:lstStyle xmlns:a="http://schemas.openxmlformats.org/drawingml/2006/main"/>
           <a:p xmlns:a="http://schemas.openxmlformats.org/drawingml/2006/main">
             <a:pPr algn="l">
+              <a:buNone/>
               <a:defRPr sz="2550" b="1">
                 <a:solidFill>
                   <a:srgbClr val="17344D"/>
@@ -8691,6 +8849,7 @@
           <a:lstStyle xmlns:a="http://schemas.openxmlformats.org/drawingml/2006/main"/>
           <a:p xmlns:a="http://schemas.openxmlformats.org/drawingml/2006/main">
             <a:pPr algn="r">
+              <a:buNone/>
               <a:defRPr sz="1200" b="1">
                 <a:solidFill>
                   <a:srgbClr val="2F9BD3"/>
@@ -8780,6 +8939,7 @@
           <a:lstStyle xmlns:a="http://schemas.openxmlformats.org/drawingml/2006/main"/>
           <a:p xmlns:a="http://schemas.openxmlformats.org/drawingml/2006/main">
             <a:pPr algn="ctr">
+              <a:buNone/>
               <a:defRPr sz="1350" b="1">
                 <a:solidFill>
                   <a:srgbClr val="2F9BD3"/>
@@ -8837,6 +8997,7 @@
           <a:lstStyle xmlns:a="http://schemas.openxmlformats.org/drawingml/2006/main"/>
           <a:p xmlns:a="http://schemas.openxmlformats.org/drawingml/2006/main">
             <a:pPr algn="ctr">
+              <a:buNone/>
               <a:defRPr sz="2100" b="1">
                 <a:solidFill>
                   <a:srgbClr val="17344D"/>
@@ -8860,6 +9021,7 @@
           </a:p>
           <a:p xmlns:a="http://schemas.openxmlformats.org/drawingml/2006/main">
             <a:pPr algn="ctr">
+              <a:buNone/>
               <a:defRPr sz="2100" b="1">
                 <a:solidFill>
                   <a:srgbClr val="17344D"/>
@@ -8949,6 +9111,7 @@
           <a:lstStyle xmlns:a="http://schemas.openxmlformats.org/drawingml/2006/main"/>
           <a:p xmlns:a="http://schemas.openxmlformats.org/drawingml/2006/main">
             <a:pPr algn="ctr">
+              <a:buNone/>
               <a:defRPr sz="1350" b="1">
                 <a:solidFill>
                   <a:srgbClr val="F59B4C"/>
@@ -9006,6 +9169,7 @@
           <a:lstStyle xmlns:a="http://schemas.openxmlformats.org/drawingml/2006/main"/>
           <a:p xmlns:a="http://schemas.openxmlformats.org/drawingml/2006/main">
             <a:pPr algn="ctr">
+              <a:buNone/>
               <a:defRPr sz="1875" b="1">
                 <a:solidFill>
                   <a:srgbClr val="17344D"/>
@@ -9029,6 +9193,7 @@
           </a:p>
           <a:p xmlns:a="http://schemas.openxmlformats.org/drawingml/2006/main">
             <a:pPr algn="ctr">
+              <a:buNone/>
               <a:defRPr sz="1875" b="1">
                 <a:solidFill>
                   <a:srgbClr val="17344D"/>
@@ -9052,6 +9217,7 @@
           </a:p>
           <a:p xmlns:a="http://schemas.openxmlformats.org/drawingml/2006/main">
             <a:pPr algn="ctr">
+              <a:buNone/>
               <a:defRPr sz="1875" b="1">
                 <a:solidFill>
                   <a:srgbClr val="17344D"/>
@@ -9174,6 +9340,7 @@
           <a:lstStyle xmlns:a="http://schemas.openxmlformats.org/drawingml/2006/main"/>
           <a:p xmlns:a="http://schemas.openxmlformats.org/drawingml/2006/main">
             <a:pPr algn="ctr">
+              <a:buNone/>
               <a:defRPr sz="975" b="1">
                 <a:solidFill>
                   <a:srgbClr val="17344D"/>
@@ -9231,6 +9398,7 @@
           <a:lstStyle xmlns:a="http://schemas.openxmlformats.org/drawingml/2006/main"/>
           <a:p xmlns:a="http://schemas.openxmlformats.org/drawingml/2006/main">
             <a:pPr algn="ctr">
+              <a:buNone/>
               <a:defRPr sz="1200" b="1">
                 <a:solidFill>
                   <a:srgbClr val="17344D"/>
@@ -9353,6 +9521,7 @@
           <a:lstStyle xmlns:a="http://schemas.openxmlformats.org/drawingml/2006/main"/>
           <a:p xmlns:a="http://schemas.openxmlformats.org/drawingml/2006/main">
             <a:pPr algn="ctr">
+              <a:buNone/>
               <a:defRPr sz="975" b="1">
                 <a:solidFill>
                   <a:srgbClr val="17344D"/>
@@ -9410,6 +9579,7 @@
           <a:lstStyle xmlns:a="http://schemas.openxmlformats.org/drawingml/2006/main"/>
           <a:p xmlns:a="http://schemas.openxmlformats.org/drawingml/2006/main">
             <a:pPr algn="ctr">
+              <a:buNone/>
               <a:defRPr sz="1200" b="1">
                 <a:solidFill>
                   <a:srgbClr val="17344D"/>
@@ -9562,6 +9732,7 @@
           <a:lstStyle xmlns:a="http://schemas.openxmlformats.org/drawingml/2006/main"/>
           <a:p xmlns:a="http://schemas.openxmlformats.org/drawingml/2006/main">
             <a:pPr algn="ctr">
+              <a:buNone/>
               <a:defRPr sz="975" b="1">
                 <a:solidFill>
                   <a:srgbClr val="17344D"/>
@@ -9619,6 +9790,7 @@
           <a:lstStyle xmlns:a="http://schemas.openxmlformats.org/drawingml/2006/main"/>
           <a:p xmlns:a="http://schemas.openxmlformats.org/drawingml/2006/main">
             <a:pPr algn="ctr">
+              <a:buNone/>
               <a:defRPr sz="1200" b="1">
                 <a:solidFill>
                   <a:srgbClr val="17344D"/>
@@ -9771,6 +9943,7 @@
           <a:lstStyle xmlns:a="http://schemas.openxmlformats.org/drawingml/2006/main"/>
           <a:p xmlns:a="http://schemas.openxmlformats.org/drawingml/2006/main">
             <a:pPr algn="ctr">
+              <a:buNone/>
               <a:defRPr sz="975" b="1">
                 <a:solidFill>
                   <a:srgbClr val="17344D"/>
@@ -9828,6 +10001,7 @@
           <a:lstStyle xmlns:a="http://schemas.openxmlformats.org/drawingml/2006/main"/>
           <a:p xmlns:a="http://schemas.openxmlformats.org/drawingml/2006/main">
             <a:pPr algn="ctr">
+              <a:buNone/>
               <a:defRPr sz="1200" b="1">
                 <a:solidFill>
                   <a:srgbClr val="17344D"/>
@@ -9980,6 +10154,7 @@
           <a:lstStyle xmlns:a="http://schemas.openxmlformats.org/drawingml/2006/main"/>
           <a:p xmlns:a="http://schemas.openxmlformats.org/drawingml/2006/main">
             <a:pPr algn="ctr">
+              <a:buNone/>
               <a:defRPr sz="975" b="1">
                 <a:solidFill>
                   <a:srgbClr val="17344D"/>
@@ -10037,6 +10212,7 @@
           <a:lstStyle xmlns:a="http://schemas.openxmlformats.org/drawingml/2006/main"/>
           <a:p xmlns:a="http://schemas.openxmlformats.org/drawingml/2006/main">
             <a:pPr algn="ctr">
+              <a:buNone/>
               <a:defRPr sz="1200" b="1">
                 <a:solidFill>
                   <a:srgbClr val="17344D"/>
@@ -10189,6 +10365,7 @@
           <a:lstStyle xmlns:a="http://schemas.openxmlformats.org/drawingml/2006/main"/>
           <a:p xmlns:a="http://schemas.openxmlformats.org/drawingml/2006/main">
             <a:pPr algn="ctr">
+              <a:buNone/>
               <a:defRPr sz="975" b="1">
                 <a:solidFill>
                   <a:srgbClr val="17344D"/>
@@ -10246,6 +10423,7 @@
           <a:lstStyle xmlns:a="http://schemas.openxmlformats.org/drawingml/2006/main"/>
           <a:p xmlns:a="http://schemas.openxmlformats.org/drawingml/2006/main">
             <a:pPr algn="ctr">
+              <a:buNone/>
               <a:defRPr sz="1200" b="1">
                 <a:solidFill>
                   <a:srgbClr val="17344D"/>
@@ -10333,6 +10511,7 @@
           <a:lstStyle xmlns:a="http://schemas.openxmlformats.org/drawingml/2006/main"/>
           <a:p xmlns:a="http://schemas.openxmlformats.org/drawingml/2006/main">
             <a:pPr algn="ctr">
+              <a:buNone/>
               <a:defRPr sz="1575" b="1">
                 <a:solidFill>
                   <a:srgbClr val="17344D"/>
@@ -10421,6 +10600,7 @@
           <a:lstStyle xmlns:a="http://schemas.openxmlformats.org/drawingml/2006/main"/>
           <a:p xmlns:a="http://schemas.openxmlformats.org/drawingml/2006/main">
             <a:pPr algn="l">
+              <a:buNone/>
               <a:defRPr sz="825" b="0">
                 <a:solidFill>
                   <a:srgbClr val="657784"/>
@@ -10478,6 +10658,7 @@
           <a:lstStyle xmlns:a="http://schemas.openxmlformats.org/drawingml/2006/main"/>
           <a:p xmlns:a="http://schemas.openxmlformats.org/drawingml/2006/main">
             <a:pPr algn="r">
+              <a:buNone/>
               <a:defRPr sz="825" b="0">
                 <a:solidFill>
                   <a:srgbClr val="657784"/>
@@ -10564,6 +10745,7 @@
           <a:lstStyle xmlns:a="http://schemas.openxmlformats.org/drawingml/2006/main"/>
           <a:p xmlns:a="http://schemas.openxmlformats.org/drawingml/2006/main">
             <a:pPr algn="l">
+              <a:buNone/>
               <a:defRPr sz="2550" b="1">
                 <a:solidFill>
                   <a:srgbClr val="17344D"/>
@@ -10653,6 +10835,7 @@
           <a:lstStyle xmlns:a="http://schemas.openxmlformats.org/drawingml/2006/main"/>
           <a:p xmlns:a="http://schemas.openxmlformats.org/drawingml/2006/main">
             <a:pPr algn="r">
+              <a:buNone/>
               <a:defRPr sz="1200" b="1">
                 <a:solidFill>
                   <a:srgbClr val="2F9BD3"/>
@@ -10742,6 +10925,7 @@
           <a:lstStyle xmlns:a="http://schemas.openxmlformats.org/drawingml/2006/main"/>
           <a:p xmlns:a="http://schemas.openxmlformats.org/drawingml/2006/main">
             <a:pPr algn="ctr">
+              <a:buNone/>
               <a:defRPr sz="1800" b="1">
                 <a:solidFill>
                   <a:srgbClr val="17344D"/>
@@ -10765,6 +10949,7 @@
           </a:p>
           <a:p xmlns:a="http://schemas.openxmlformats.org/drawingml/2006/main">
             <a:pPr algn="ctr">
+              <a:buNone/>
               <a:defRPr sz="1800" b="1">
                 <a:solidFill>
                   <a:srgbClr val="17344D"/>
@@ -10822,6 +11007,7 @@
           <a:lstStyle xmlns:a="http://schemas.openxmlformats.org/drawingml/2006/main"/>
           <a:p xmlns:a="http://schemas.openxmlformats.org/drawingml/2006/main">
             <a:pPr algn="ctr">
+              <a:buNone/>
               <a:defRPr sz="1500" b="1">
                 <a:solidFill>
                   <a:srgbClr val="2F9BD3"/>
@@ -10912,6 +11098,7 @@
           <a:lstStyle xmlns:a="http://schemas.openxmlformats.org/drawingml/2006/main"/>
           <a:p xmlns:a="http://schemas.openxmlformats.org/drawingml/2006/main">
             <a:pPr algn="ctr">
+              <a:buNone/>
               <a:defRPr sz="2550" b="1">
                 <a:solidFill>
                   <a:srgbClr val="17344D"/>
@@ -10969,6 +11156,7 @@
           <a:lstStyle xmlns:a="http://schemas.openxmlformats.org/drawingml/2006/main"/>
           <a:p xmlns:a="http://schemas.openxmlformats.org/drawingml/2006/main">
             <a:pPr algn="ctr">
+              <a:buNone/>
               <a:defRPr sz="1425" b="1">
                 <a:solidFill>
                   <a:srgbClr val="17344D"/>
@@ -11059,6 +11247,7 @@
           <a:lstStyle xmlns:a="http://schemas.openxmlformats.org/drawingml/2006/main"/>
           <a:p xmlns:a="http://schemas.openxmlformats.org/drawingml/2006/main">
             <a:pPr algn="ctr">
+              <a:buNone/>
               <a:defRPr sz="2550" b="1">
                 <a:solidFill>
                   <a:srgbClr val="17344D"/>
@@ -11116,6 +11305,7 @@
           <a:lstStyle xmlns:a="http://schemas.openxmlformats.org/drawingml/2006/main"/>
           <a:p xmlns:a="http://schemas.openxmlformats.org/drawingml/2006/main">
             <a:pPr algn="ctr">
+              <a:buNone/>
               <a:defRPr sz="1425" b="1">
                 <a:solidFill>
                   <a:srgbClr val="17344D"/>
@@ -11206,6 +11396,7 @@
           <a:lstStyle xmlns:a="http://schemas.openxmlformats.org/drawingml/2006/main"/>
           <a:p xmlns:a="http://schemas.openxmlformats.org/drawingml/2006/main">
             <a:pPr algn="ctr">
+              <a:buNone/>
               <a:defRPr sz="2550" b="1">
                 <a:solidFill>
                   <a:srgbClr val="17344D"/>
@@ -11263,6 +11454,7 @@
           <a:lstStyle xmlns:a="http://schemas.openxmlformats.org/drawingml/2006/main"/>
           <a:p xmlns:a="http://schemas.openxmlformats.org/drawingml/2006/main">
             <a:pPr algn="ctr">
+              <a:buNone/>
               <a:defRPr sz="1425" b="1">
                 <a:solidFill>
                   <a:srgbClr val="17344D"/>
@@ -11352,6 +11544,7 @@
           <a:lstStyle xmlns:a="http://schemas.openxmlformats.org/drawingml/2006/main"/>
           <a:p xmlns:a="http://schemas.openxmlformats.org/drawingml/2006/main">
             <a:pPr algn="ctr">
+              <a:buNone/>
               <a:defRPr sz="1425" b="1">
                 <a:solidFill>
                   <a:srgbClr val="17344D"/>
@@ -11440,6 +11633,7 @@
           <a:lstStyle xmlns:a="http://schemas.openxmlformats.org/drawingml/2006/main"/>
           <a:p xmlns:a="http://schemas.openxmlformats.org/drawingml/2006/main">
             <a:pPr algn="l">
+              <a:buNone/>
               <a:defRPr sz="825" b="0">
                 <a:solidFill>
                   <a:srgbClr val="657784"/>
@@ -11497,6 +11691,7 @@
           <a:lstStyle xmlns:a="http://schemas.openxmlformats.org/drawingml/2006/main"/>
           <a:p xmlns:a="http://schemas.openxmlformats.org/drawingml/2006/main">
             <a:pPr algn="r">
+              <a:buNone/>
               <a:defRPr sz="825" b="0">
                 <a:solidFill>
                   <a:srgbClr val="657784"/>
@@ -11551,28 +11746,87 @@
       </p:grpSpPr>
       <p:sp>
         <p:nvSpPr>
-          <p:cNvPr id="9" name="">
-            <a:extLst xmlns:a="http://schemas.openxmlformats.org/drawingml/2006/main">
-              <a:ext uri="{FF2B5EF4-FFF2-40B4-BE49-F238E27FC236}">
-                <a16:creationId xmlns:a16="http://schemas.microsoft.com/office/drawing/2014/main" id="{14CAFE0F-4EA4-4A37-B59A-9B8675D479DB}"/>
-              </a:ext>
-            </a:extLst>
-          </p:cNvPr>
-          <p:cNvSpPr>
-            <a:spLocks xmlns:a="http://schemas.openxmlformats.org/drawingml/2006/main" noGrp="1"/>
-          </p:cNvSpPr>
-          <p:nvPr/>
-        </p:nvSpPr>
-        <p:spPr>
-          <a:xfrm xmlns:a="http://schemas.openxmlformats.org/drawingml/2006/main">
-            <a:off x="7848600" y="1447800"/>
-            <a:ext cx="2571750" cy="2571750"/>
-          </a:xfrm>
-          <a:prstGeom xmlns:a="http://schemas.openxmlformats.org/drawingml/2006/main" prst="ellipse">
-            <a:avLst/>
+          <p:cNvPr id="50" name="">
+            <a:extLst xmlns:a="http://schemas.openxmlformats.org/drawingml/2006/main">
+              <a:ext uri="{FF2B5EF4-FFF2-40B4-BE49-F238E27FC236}">
+                <a16:creationId xmlns:a16="http://schemas.microsoft.com/office/drawing/2014/main" id="{8A8FE437-CCA5-4EB0-AEE5-C5EEA0C3DA3B}"/>
+              </a:ext>
+            </a:extLst>
+          </p:cNvPr>
+          <p:cNvSpPr>
+            <a:spLocks xmlns:a="http://schemas.openxmlformats.org/drawingml/2006/main" noGrp="1"/>
+          </p:cNvSpPr>
+          <p:nvPr/>
+        </p:nvSpPr>
+        <p:spPr>
+          <a:xfrm xmlns:a="http://schemas.openxmlformats.org/drawingml/2006/main">
+            <a:off x="723900" y="495300"/>
+            <a:ext cx="8382000" cy="552450"/>
+          </a:xfrm>
+          <a:prstGeom xmlns:a="http://schemas.openxmlformats.org/drawingml/2006/main" prst="rect">
+            <a:avLst/>
+          </a:prstGeom>
+          <a:noFill xmlns:a="http://schemas.openxmlformats.org/drawingml/2006/main"/>
+          <a:ln xmlns:a="http://schemas.openxmlformats.org/drawingml/2006/main" w="0">
+            <a:noFill/>
+          </a:ln>
+        </p:spPr>
+        <p:txBody>
+          <a:bodyPr xmlns:a="http://schemas.openxmlformats.org/drawingml/2006/main" lIns="0" tIns="0" rIns="0" bIns="0" anchor="ctr">
+            <a:normAutofit fontScale="100000"/>
+          </a:bodyPr>
+          <a:lstStyle xmlns:a="http://schemas.openxmlformats.org/drawingml/2006/main"/>
+          <a:p xmlns:a="http://schemas.openxmlformats.org/drawingml/2006/main">
+            <a:pPr algn="l">
+              <a:defRPr sz="2550" b="1">
+                <a:solidFill>
+                  <a:srgbClr val="17344D"/>
+                </a:solidFill>
+                <a:latin typeface="Noto Sans TC"/>
+                <a:ea typeface="Noto Sans TC"/>
+                <a:cs typeface="Noto Sans TC"/>
+              </a:defRPr>
+            </a:pPr>
+            <a:r>
+              <a:rPr sz="2550" b="1">
+                <a:solidFill>
+                  <a:srgbClr val="17344D"/>
+                </a:solidFill>
+                <a:latin typeface="Noto Sans TC"/>
+                <a:ea typeface="Noto Sans TC"/>
+                <a:cs typeface="Noto Sans TC"/>
+              </a:rPr>
+              <a:t>遊玩與金幣消耗循環</a:t>
+            </a:r>
+          </a:p>
+        </p:txBody>
+      </p:sp>
+      <p:sp>
+        <p:nvSpPr>
+          <p:cNvPr id="2" name="">
+            <a:extLst xmlns:a="http://schemas.openxmlformats.org/drawingml/2006/main">
+              <a:ext uri="{FF2B5EF4-FFF2-40B4-BE49-F238E27FC236}">
+                <a16:creationId xmlns:a16="http://schemas.microsoft.com/office/drawing/2014/main" id="{C21BC1B3-8D73-4140-BEC0-B0F3F3600094}"/>
+              </a:ext>
+            </a:extLst>
+          </p:cNvPr>
+          <p:cNvSpPr>
+            <a:spLocks xmlns:a="http://schemas.openxmlformats.org/drawingml/2006/main" noGrp="1"/>
+          </p:cNvSpPr>
+          <p:nvPr/>
+        </p:nvSpPr>
+        <p:spPr>
+          <a:xfrm xmlns:a="http://schemas.openxmlformats.org/drawingml/2006/main">
+            <a:off x="723900" y="1133475"/>
+            <a:ext cx="628650" cy="57150"/>
+          </a:xfrm>
+          <a:prstGeom xmlns:a="http://schemas.openxmlformats.org/drawingml/2006/main" prst="roundRect">
+            <a:avLst>
+              <a:gd name="adj" fmla="val 50000"/>
+            </a:avLst>
           </a:prstGeom>
           <a:solidFill xmlns:a="http://schemas.openxmlformats.org/drawingml/2006/main">
-            <a:srgbClr val="DDF5F6"/>
+            <a:srgbClr val="F8C449"/>
           </a:solidFill>
           <a:ln xmlns:a="http://schemas.openxmlformats.org/drawingml/2006/main" w="0">
             <a:noFill/>
@@ -11581,228 +11835,88 @@
       </p:sp>
       <p:sp>
         <p:nvSpPr>
-          <p:cNvPr id="2" name="">
-            <a:extLst xmlns:a="http://schemas.openxmlformats.org/drawingml/2006/main">
-              <a:ext uri="{FF2B5EF4-FFF2-40B4-BE49-F238E27FC236}">
-                <a16:creationId xmlns:a16="http://schemas.microsoft.com/office/drawing/2014/main" id="{AABB1D5D-AB6A-4661-BA6D-3C3F49DF0F05}"/>
-              </a:ext>
-            </a:extLst>
-          </p:cNvPr>
-          <p:cNvSpPr>
-            <a:spLocks xmlns:a="http://schemas.openxmlformats.org/drawingml/2006/main" noGrp="1"/>
-          </p:cNvSpPr>
-          <p:nvPr/>
-        </p:nvSpPr>
-        <p:spPr>
-          <a:xfrm xmlns:a="http://schemas.openxmlformats.org/drawingml/2006/main">
-            <a:off x="8839200" y="2952750"/>
-            <a:ext cx="2190750" cy="2190750"/>
-          </a:xfrm>
-          <a:prstGeom xmlns:a="http://schemas.openxmlformats.org/drawingml/2006/main" prst="ellipse">
-            <a:avLst/>
+          <p:cNvPr id="3" name="">
+            <a:extLst xmlns:a="http://schemas.openxmlformats.org/drawingml/2006/main">
+              <a:ext uri="{FF2B5EF4-FFF2-40B4-BE49-F238E27FC236}">
+                <a16:creationId xmlns:a16="http://schemas.microsoft.com/office/drawing/2014/main" id="{A22648F5-5544-4A9E-98E5-F16A1FBA0314}"/>
+              </a:ext>
+            </a:extLst>
+          </p:cNvPr>
+          <p:cNvSpPr>
+            <a:spLocks xmlns:a="http://schemas.openxmlformats.org/drawingml/2006/main" noGrp="1"/>
+          </p:cNvSpPr>
+          <p:nvPr/>
+        </p:nvSpPr>
+        <p:spPr>
+          <a:xfrm xmlns:a="http://schemas.openxmlformats.org/drawingml/2006/main">
+            <a:off x="10668000" y="542925"/>
+            <a:ext cx="762000" cy="323850"/>
+          </a:xfrm>
+          <a:prstGeom xmlns:a="http://schemas.openxmlformats.org/drawingml/2006/main" prst="rect">
+            <a:avLst/>
+          </a:prstGeom>
+          <a:noFill xmlns:a="http://schemas.openxmlformats.org/drawingml/2006/main"/>
+          <a:ln xmlns:a="http://schemas.openxmlformats.org/drawingml/2006/main" w="0">
+            <a:noFill/>
+          </a:ln>
+        </p:spPr>
+        <p:txBody>
+          <a:bodyPr xmlns:a="http://schemas.openxmlformats.org/drawingml/2006/main" lIns="0" tIns="0" rIns="0" bIns="0" anchor="ctr">
+            <a:normAutofit fontScale="100000"/>
+          </a:bodyPr>
+          <a:lstStyle xmlns:a="http://schemas.openxmlformats.org/drawingml/2006/main"/>
+          <a:p xmlns:a="http://schemas.openxmlformats.org/drawingml/2006/main">
+            <a:pPr algn="r">
+              <a:defRPr sz="1200" b="1">
+                <a:solidFill>
+                  <a:srgbClr val="2F9BD3"/>
+                </a:solidFill>
+                <a:latin typeface="Noto Sans TC"/>
+                <a:ea typeface="Noto Sans TC"/>
+                <a:cs typeface="Noto Sans TC"/>
+              </a:defRPr>
+            </a:pPr>
+            <a:r>
+              <a:rPr sz="1200" b="1">
+                <a:solidFill>
+                  <a:srgbClr val="2F9BD3"/>
+                </a:solidFill>
+                <a:latin typeface="Noto Sans TC"/>
+                <a:ea typeface="Noto Sans TC"/>
+                <a:cs typeface="Noto Sans TC"/>
+              </a:rPr>
+              <a:t>08</a:t>
+            </a:r>
+          </a:p>
+        </p:txBody>
+      </p:sp>
+      <p:sp>
+        <p:nvSpPr>
+          <p:cNvPr id="4" name="">
+            <a:extLst xmlns:a="http://schemas.openxmlformats.org/drawingml/2006/main">
+              <a:ext uri="{FF2B5EF4-FFF2-40B4-BE49-F238E27FC236}">
+                <a16:creationId xmlns:a16="http://schemas.microsoft.com/office/drawing/2014/main" id="{7E6AB0DD-1F92-4240-BC30-619C99F23B69}"/>
+              </a:ext>
+            </a:extLst>
+          </p:cNvPr>
+          <p:cNvSpPr>
+            <a:spLocks xmlns:a="http://schemas.openxmlformats.org/drawingml/2006/main" noGrp="1"/>
+          </p:cNvSpPr>
+          <p:nvPr/>
+        </p:nvSpPr>
+        <p:spPr>
+          <a:xfrm xmlns:a="http://schemas.openxmlformats.org/drawingml/2006/main">
+            <a:off x="704850" y="1809750"/>
+            <a:ext cx="1428750" cy="990600"/>
+          </a:xfrm>
+          <a:prstGeom xmlns:a="http://schemas.openxmlformats.org/drawingml/2006/main" prst="roundRect">
+            <a:avLst>
+              <a:gd name="adj" fmla="val 7692"/>
+            </a:avLst>
           </a:prstGeom>
           <a:solidFill xmlns:a="http://schemas.openxmlformats.org/drawingml/2006/main">
             <a:srgbClr val="FFF4D6"/>
           </a:solidFill>
-          <a:ln xmlns:a="http://schemas.openxmlformats.org/drawingml/2006/main" w="0">
-            <a:noFill/>
-          </a:ln>
-        </p:spPr>
-      </p:sp>
-      <p:sp>
-        <p:nvSpPr>
-          <p:cNvPr id="3" name="">
-            <a:extLst xmlns:a="http://schemas.openxmlformats.org/drawingml/2006/main">
-              <a:ext uri="{FF2B5EF4-FFF2-40B4-BE49-F238E27FC236}">
-                <a16:creationId xmlns:a16="http://schemas.microsoft.com/office/drawing/2014/main" id="{2B5D4F4A-2913-4853-AF7F-2C0769090764}"/>
-              </a:ext>
-            </a:extLst>
-          </p:cNvPr>
-          <p:cNvSpPr>
-            <a:spLocks xmlns:a="http://schemas.openxmlformats.org/drawingml/2006/main" noGrp="1"/>
-          </p:cNvSpPr>
-          <p:nvPr/>
-        </p:nvSpPr>
-        <p:spPr>
-          <a:xfrm xmlns:a="http://schemas.openxmlformats.org/drawingml/2006/main">
-            <a:off x="838200" y="2362200"/>
-            <a:ext cx="5048250" cy="857250"/>
-          </a:xfrm>
-          <a:prstGeom xmlns:a="http://schemas.openxmlformats.org/drawingml/2006/main" prst="rect">
-            <a:avLst/>
-          </a:prstGeom>
-          <a:noFill xmlns:a="http://schemas.openxmlformats.org/drawingml/2006/main"/>
-          <a:ln xmlns:a="http://schemas.openxmlformats.org/drawingml/2006/main" w="0">
-            <a:noFill/>
-          </a:ln>
-        </p:spPr>
-        <p:txBody>
-          <a:bodyPr xmlns:a="http://schemas.openxmlformats.org/drawingml/2006/main" lIns="0" tIns="0" rIns="0" bIns="0" anchor="ctr">
-            <a:normAutofit fontScale="100000"/>
-          </a:bodyPr>
-          <a:lstStyle xmlns:a="http://schemas.openxmlformats.org/drawingml/2006/main"/>
-          <a:p xmlns:a="http://schemas.openxmlformats.org/drawingml/2006/main">
-            <a:pPr algn="l">
-              <a:defRPr sz="4500" b="1">
-                <a:solidFill>
-                  <a:srgbClr val="17344D"/>
-                </a:solidFill>
-                <a:latin typeface="Noto Sans TC"/>
-                <a:ea typeface="Noto Sans TC"/>
-                <a:cs typeface="Noto Sans TC"/>
-              </a:defRPr>
-            </a:pPr>
-            <a:r>
-              <a:rPr sz="4500" b="1">
-                <a:solidFill>
-                  <a:srgbClr val="17344D"/>
-                </a:solidFill>
-                <a:latin typeface="Noto Sans TC"/>
-                <a:ea typeface="Noto Sans TC"/>
-                <a:cs typeface="Noto Sans TC"/>
-              </a:rPr>
-              <a:t>Q&amp;A</a:t>
-            </a:r>
-          </a:p>
-        </p:txBody>
-      </p:sp>
-      <p:sp>
-        <p:nvSpPr>
-          <p:cNvPr id="4" name="">
-            <a:extLst xmlns:a="http://schemas.openxmlformats.org/drawingml/2006/main">
-              <a:ext uri="{FF2B5EF4-FFF2-40B4-BE49-F238E27FC236}">
-                <a16:creationId xmlns:a16="http://schemas.microsoft.com/office/drawing/2014/main" id="{E25676B2-1A3E-406F-A3D5-1F0443EB2177}"/>
-              </a:ext>
-            </a:extLst>
-          </p:cNvPr>
-          <p:cNvSpPr>
-            <a:spLocks xmlns:a="http://schemas.openxmlformats.org/drawingml/2006/main" noGrp="1"/>
-          </p:cNvSpPr>
-          <p:nvPr/>
-        </p:nvSpPr>
-        <p:spPr>
-          <a:xfrm xmlns:a="http://schemas.openxmlformats.org/drawingml/2006/main">
-            <a:off x="895350" y="3429000"/>
-            <a:ext cx="3333750" cy="419100"/>
-          </a:xfrm>
-          <a:prstGeom xmlns:a="http://schemas.openxmlformats.org/drawingml/2006/main" prst="rect">
-            <a:avLst/>
-          </a:prstGeom>
-          <a:noFill xmlns:a="http://schemas.openxmlformats.org/drawingml/2006/main"/>
-          <a:ln xmlns:a="http://schemas.openxmlformats.org/drawingml/2006/main" w="0">
-            <a:noFill/>
-          </a:ln>
-        </p:spPr>
-        <p:txBody>
-          <a:bodyPr xmlns:a="http://schemas.openxmlformats.org/drawingml/2006/main" lIns="0" tIns="0" rIns="0" bIns="0" anchor="ctr">
-            <a:normAutofit fontScale="100000"/>
-          </a:bodyPr>
-          <a:lstStyle xmlns:a="http://schemas.openxmlformats.org/drawingml/2006/main"/>
-          <a:p xmlns:a="http://schemas.openxmlformats.org/drawingml/2006/main">
-            <a:pPr algn="l">
-              <a:defRPr sz="2100" b="1">
-                <a:solidFill>
-                  <a:srgbClr val="2F9BD3"/>
-                </a:solidFill>
-                <a:latin typeface="Noto Sans TC"/>
-                <a:ea typeface="Noto Sans TC"/>
-                <a:cs typeface="Noto Sans TC"/>
-              </a:defRPr>
-            </a:pPr>
-            <a:r>
-              <a:rPr sz="2100" b="1">
-                <a:solidFill>
-                  <a:srgbClr val="2F9BD3"/>
-                </a:solidFill>
-                <a:latin typeface="Noto Sans TC"/>
-                <a:ea typeface="Noto Sans TC"/>
-                <a:cs typeface="Noto Sans TC"/>
-              </a:rPr>
-              <a:t>謝謝聆聽</a:t>
-            </a:r>
-          </a:p>
-        </p:txBody>
-      </p:sp>
-      <p:sp>
-        <p:nvSpPr>
-          <p:cNvPr id="5" name="">
-            <a:extLst xmlns:a="http://schemas.openxmlformats.org/drawingml/2006/main">
-              <a:ext uri="{FF2B5EF4-FFF2-40B4-BE49-F238E27FC236}">
-                <a16:creationId xmlns:a16="http://schemas.microsoft.com/office/drawing/2014/main" id="{5369E26F-E081-4236-A043-91EB548EAC6A}"/>
-              </a:ext>
-            </a:extLst>
-          </p:cNvPr>
-          <p:cNvSpPr>
-            <a:spLocks xmlns:a="http://schemas.openxmlformats.org/drawingml/2006/main" noGrp="1"/>
-          </p:cNvSpPr>
-          <p:nvPr/>
-        </p:nvSpPr>
-        <p:spPr>
-          <a:xfrm xmlns:a="http://schemas.openxmlformats.org/drawingml/2006/main">
-            <a:off x="895350" y="4829175"/>
-            <a:ext cx="4000500" cy="285750"/>
-          </a:xfrm>
-          <a:prstGeom xmlns:a="http://schemas.openxmlformats.org/drawingml/2006/main" prst="rect">
-            <a:avLst/>
-          </a:prstGeom>
-          <a:noFill xmlns:a="http://schemas.openxmlformats.org/drawingml/2006/main"/>
-          <a:ln xmlns:a="http://schemas.openxmlformats.org/drawingml/2006/main" w="0">
-            <a:noFill/>
-          </a:ln>
-        </p:spPr>
-        <p:txBody>
-          <a:bodyPr xmlns:a="http://schemas.openxmlformats.org/drawingml/2006/main" lIns="0" tIns="0" rIns="0" bIns="0" anchor="ctr">
-            <a:normAutofit fontScale="100000"/>
-          </a:bodyPr>
-          <a:lstStyle xmlns:a="http://schemas.openxmlformats.org/drawingml/2006/main"/>
-          <a:p xmlns:a="http://schemas.openxmlformats.org/drawingml/2006/main">
-            <a:pPr algn="l">
-              <a:defRPr sz="1350" b="0">
-                <a:solidFill>
-                  <a:srgbClr val="657784"/>
-                </a:solidFill>
-                <a:latin typeface="Noto Sans TC"/>
-                <a:ea typeface="Noto Sans TC"/>
-                <a:cs typeface="Noto Sans TC"/>
-              </a:defRPr>
-            </a:pPr>
-            <a:r>
-              <a:rPr sz="1350" b="0">
-                <a:solidFill>
-                  <a:srgbClr val="657784"/>
-                </a:solidFill>
-                <a:latin typeface="Noto Sans TC"/>
-                <a:ea typeface="Noto Sans TC"/>
-                <a:cs typeface="Noto Sans TC"/>
-              </a:rPr>
-              <a:t>小鳥過馬路  Traffic Bird</a:t>
-            </a:r>
-          </a:p>
-        </p:txBody>
-      </p:sp>
-      <p:sp>
-        <p:nvSpPr>
-          <p:cNvPr id="6" name="">
-            <a:extLst xmlns:a="http://schemas.openxmlformats.org/drawingml/2006/main">
-              <a:ext uri="{FF2B5EF4-FFF2-40B4-BE49-F238E27FC236}">
-                <a16:creationId xmlns:a16="http://schemas.microsoft.com/office/drawing/2014/main" id="{A901D731-4E9C-4A3D-846C-51EC7E0EA35E}"/>
-              </a:ext>
-            </a:extLst>
-          </p:cNvPr>
-          <p:cNvSpPr>
-            <a:spLocks xmlns:a="http://schemas.openxmlformats.org/drawingml/2006/main" noGrp="1"/>
-          </p:cNvSpPr>
-          <p:nvPr/>
-        </p:nvSpPr>
-        <p:spPr>
-          <a:xfrm xmlns:a="http://schemas.openxmlformats.org/drawingml/2006/main">
-            <a:off x="723900" y="6362700"/>
-            <a:ext cx="10744200" cy="0"/>
-          </a:xfrm>
-          <a:prstGeom xmlns:a="http://schemas.openxmlformats.org/drawingml/2006/main" prst="line">
-            <a:avLst/>
-          </a:prstGeom>
-          <a:noFill xmlns:a="http://schemas.openxmlformats.org/drawingml/2006/main"/>
           <a:ln xmlns:a="http://schemas.openxmlformats.org/drawingml/2006/main" w="9525">
             <a:solidFill>
               <a:srgbClr val="D7E5E8"/>
@@ -11813,22 +11927,476 @@
       </p:sp>
       <p:sp>
         <p:nvSpPr>
+          <p:cNvPr id="5" name="">
+            <a:extLst xmlns:a="http://schemas.openxmlformats.org/drawingml/2006/main">
+              <a:ext uri="{FF2B5EF4-FFF2-40B4-BE49-F238E27FC236}">
+                <a16:creationId xmlns:a16="http://schemas.microsoft.com/office/drawing/2014/main" id="{329AAB54-F40D-4786-A460-D7E6DDC98BA9}"/>
+              </a:ext>
+            </a:extLst>
+          </p:cNvPr>
+          <p:cNvSpPr>
+            <a:spLocks xmlns:a="http://schemas.openxmlformats.org/drawingml/2006/main" noGrp="1"/>
+          </p:cNvSpPr>
+          <p:nvPr/>
+        </p:nvSpPr>
+        <p:spPr>
+          <a:xfrm xmlns:a="http://schemas.openxmlformats.org/drawingml/2006/main">
+            <a:off x="800100" y="1914525"/>
+            <a:ext cx="1238250" cy="285750"/>
+          </a:xfrm>
+          <a:prstGeom xmlns:a="http://schemas.openxmlformats.org/drawingml/2006/main" prst="rect">
+            <a:avLst/>
+          </a:prstGeom>
+          <a:noFill xmlns:a="http://schemas.openxmlformats.org/drawingml/2006/main"/>
+          <a:ln xmlns:a="http://schemas.openxmlformats.org/drawingml/2006/main" w="0">
+            <a:noFill/>
+          </a:ln>
+        </p:spPr>
+        <p:txBody>
+          <a:bodyPr xmlns:a="http://schemas.openxmlformats.org/drawingml/2006/main" lIns="0" tIns="0" rIns="0" bIns="0" anchor="ctr">
+            <a:normAutofit fontScale="78125"/>
+          </a:bodyPr>
+          <a:lstStyle xmlns:a="http://schemas.openxmlformats.org/drawingml/2006/main"/>
+          <a:p xmlns:a="http://schemas.openxmlformats.org/drawingml/2006/main">
+            <a:pPr algn="ctr">
+              <a:defRPr sz="1200" b="1">
+                <a:solidFill>
+                  <a:srgbClr val="17344D"/>
+                </a:solidFill>
+                <a:latin typeface="Noto Sans TC"/>
+                <a:ea typeface="Noto Sans TC"/>
+                <a:cs typeface="Noto Sans TC"/>
+              </a:defRPr>
+            </a:pPr>
+            <a:r>
+              <a:rPr sz="1200" b="1">
+                <a:solidFill>
+                  <a:srgbClr val="17344D"/>
+                </a:solidFill>
+                <a:latin typeface="Noto Sans TC"/>
+                <a:ea typeface="Noto Sans TC"/>
+                <a:cs typeface="Noto Sans TC"/>
+              </a:rPr>
+              <a:t>進局前</a:t>
+            </a:r>
+          </a:p>
+          <a:p xmlns:a="http://schemas.openxmlformats.org/drawingml/2006/main">
+            <a:pPr algn="ctr">
+              <a:defRPr sz="1200" b="1">
+                <a:solidFill>
+                  <a:srgbClr val="17344D"/>
+                </a:solidFill>
+                <a:latin typeface="Noto Sans TC"/>
+                <a:ea typeface="Noto Sans TC"/>
+                <a:cs typeface="Noto Sans TC"/>
+              </a:defRPr>
+            </a:pPr>
+            <a:r>
+              <a:rPr sz="1200" b="1">
+                <a:solidFill>
+                  <a:srgbClr val="17344D"/>
+                </a:solidFill>
+                <a:latin typeface="Noto Sans TC"/>
+                <a:ea typeface="Noto Sans TC"/>
+                <a:cs typeface="Noto Sans TC"/>
+              </a:rPr>
+              <a:t>消耗金幣</a:t>
+            </a:r>
+          </a:p>
+        </p:txBody>
+      </p:sp>
+      <p:sp>
+        <p:nvSpPr>
+          <p:cNvPr id="6" name="">
+            <a:extLst xmlns:a="http://schemas.openxmlformats.org/drawingml/2006/main">
+              <a:ext uri="{FF2B5EF4-FFF2-40B4-BE49-F238E27FC236}">
+                <a16:creationId xmlns:a16="http://schemas.microsoft.com/office/drawing/2014/main" id="{50DFD844-5AC1-4F33-B7B8-A5D3B3875E48}"/>
+              </a:ext>
+            </a:extLst>
+          </p:cNvPr>
+          <p:cNvSpPr>
+            <a:spLocks xmlns:a="http://schemas.openxmlformats.org/drawingml/2006/main" noGrp="1"/>
+          </p:cNvSpPr>
+          <p:nvPr/>
+        </p:nvSpPr>
+        <p:spPr>
+          <a:xfrm xmlns:a="http://schemas.openxmlformats.org/drawingml/2006/main">
+            <a:off x="800100" y="2219325"/>
+            <a:ext cx="1238250" cy="533400"/>
+          </a:xfrm>
+          <a:prstGeom xmlns:a="http://schemas.openxmlformats.org/drawingml/2006/main" prst="rect">
+            <a:avLst/>
+          </a:prstGeom>
+          <a:noFill xmlns:a="http://schemas.openxmlformats.org/drawingml/2006/main"/>
+          <a:ln xmlns:a="http://schemas.openxmlformats.org/drawingml/2006/main" w="0">
+            <a:noFill/>
+          </a:ln>
+        </p:spPr>
+        <p:txBody>
+          <a:bodyPr xmlns:a="http://schemas.openxmlformats.org/drawingml/2006/main" lIns="0" tIns="0" rIns="0" bIns="0" anchor="t">
+            <a:normAutofit fontScale="100000"/>
+          </a:bodyPr>
+          <a:lstStyle xmlns:a="http://schemas.openxmlformats.org/drawingml/2006/main"/>
+          <a:p xmlns:a="http://schemas.openxmlformats.org/drawingml/2006/main">
+            <a:pPr algn="ctr">
+              <a:defRPr sz="825" b="0">
+                <a:solidFill>
+                  <a:srgbClr val="657784"/>
+                </a:solidFill>
+                <a:latin typeface="Noto Sans TC"/>
+                <a:ea typeface="Noto Sans TC"/>
+                <a:cs typeface="Noto Sans TC"/>
+              </a:defRPr>
+            </a:pPr>
+            <a:r>
+              <a:rPr sz="825" b="0">
+                <a:solidFill>
+                  <a:srgbClr val="657784"/>
+                </a:solidFill>
+                <a:latin typeface="Noto Sans TC"/>
+                <a:ea typeface="Noto Sans TC"/>
+                <a:cs typeface="Noto Sans TC"/>
+              </a:rPr>
+              <a:t>攜帶 1 個一次性</a:t>
+            </a:r>
+          </a:p>
+          <a:p xmlns:a="http://schemas.openxmlformats.org/drawingml/2006/main">
+            <a:pPr algn="ctr">
+              <a:defRPr sz="825" b="0">
+                <a:solidFill>
+                  <a:srgbClr val="657784"/>
+                </a:solidFill>
+                <a:latin typeface="Noto Sans TC"/>
+                <a:ea typeface="Noto Sans TC"/>
+                <a:cs typeface="Noto Sans TC"/>
+              </a:defRPr>
+            </a:pPr>
+            <a:r>
+              <a:rPr sz="825" b="0">
+                <a:solidFill>
+                  <a:srgbClr val="657784"/>
+                </a:solidFill>
+                <a:latin typeface="Noto Sans TC"/>
+                <a:ea typeface="Noto Sans TC"/>
+                <a:cs typeface="Noto Sans TC"/>
+              </a:rPr>
+              <a:t>輔助道具</a:t>
+            </a:r>
+          </a:p>
+        </p:txBody>
+      </p:sp>
+      <p:sp>
+        <p:nvSpPr>
           <p:cNvPr id="7" name="">
             <a:extLst xmlns:a="http://schemas.openxmlformats.org/drawingml/2006/main">
               <a:ext uri="{FF2B5EF4-FFF2-40B4-BE49-F238E27FC236}">
-                <a16:creationId xmlns:a16="http://schemas.microsoft.com/office/drawing/2014/main" id="{E9FBC5FE-98E3-4D5C-9CCF-38E33572D564}"/>
-              </a:ext>
-            </a:extLst>
-          </p:cNvPr>
-          <p:cNvSpPr>
-            <a:spLocks xmlns:a="http://schemas.openxmlformats.org/drawingml/2006/main" noGrp="1"/>
-          </p:cNvSpPr>
-          <p:nvPr/>
-        </p:nvSpPr>
-        <p:spPr>
-          <a:xfrm xmlns:a="http://schemas.openxmlformats.org/drawingml/2006/main">
-            <a:off x="723900" y="6467475"/>
-            <a:ext cx="4762500" cy="171450"/>
+                <a16:creationId xmlns:a16="http://schemas.microsoft.com/office/drawing/2014/main" id="{8F8273ED-96A0-4C23-9CBE-A2B12C06CC3A}"/>
+              </a:ext>
+            </a:extLst>
+          </p:cNvPr>
+          <p:cNvSpPr>
+            <a:spLocks xmlns:a="http://schemas.openxmlformats.org/drawingml/2006/main" noGrp="1"/>
+          </p:cNvSpPr>
+          <p:nvPr/>
+        </p:nvSpPr>
+        <p:spPr>
+          <a:xfrm xmlns:a="http://schemas.openxmlformats.org/drawingml/2006/main">
+            <a:off x="857250" y="2705100"/>
+            <a:ext cx="1123950" cy="38100"/>
+          </a:xfrm>
+          <a:prstGeom xmlns:a="http://schemas.openxmlformats.org/drawingml/2006/main" prst="roundRect">
+            <a:avLst>
+              <a:gd name="adj" fmla="val 50000"/>
+            </a:avLst>
+          </a:prstGeom>
+          <a:solidFill xmlns:a="http://schemas.openxmlformats.org/drawingml/2006/main">
+            <a:srgbClr val="F59B4C"/>
+          </a:solidFill>
+          <a:ln xmlns:a="http://schemas.openxmlformats.org/drawingml/2006/main" w="0">
+            <a:noFill/>
+          </a:ln>
+        </p:spPr>
+      </p:sp>
+      <p:sp>
+        <p:nvSpPr>
+          <p:cNvPr id="8" name="">
+            <a:extLst xmlns:a="http://schemas.openxmlformats.org/drawingml/2006/main">
+              <a:ext uri="{FF2B5EF4-FFF2-40B4-BE49-F238E27FC236}">
+                <a16:creationId xmlns:a16="http://schemas.microsoft.com/office/drawing/2014/main" id="{1D98F192-39DF-465A-8894-EC44D9AFA58F}"/>
+              </a:ext>
+            </a:extLst>
+          </p:cNvPr>
+          <p:cNvSpPr>
+            <a:spLocks xmlns:a="http://schemas.openxmlformats.org/drawingml/2006/main" noGrp="1"/>
+          </p:cNvSpPr>
+          <p:nvPr/>
+        </p:nvSpPr>
+        <p:spPr>
+          <a:xfrm xmlns:a="http://schemas.openxmlformats.org/drawingml/2006/main">
+            <a:off x="2495550" y="1809750"/>
+            <a:ext cx="1428750" cy="990600"/>
+          </a:xfrm>
+          <a:prstGeom xmlns:a="http://schemas.openxmlformats.org/drawingml/2006/main" prst="roundRect">
+            <a:avLst>
+              <a:gd name="adj" fmla="val 7692"/>
+            </a:avLst>
+          </a:prstGeom>
+          <a:solidFill xmlns:a="http://schemas.openxmlformats.org/drawingml/2006/main">
+            <a:srgbClr val="F0FBFB"/>
+          </a:solidFill>
+          <a:ln xmlns:a="http://schemas.openxmlformats.org/drawingml/2006/main" w="9525">
+            <a:solidFill>
+              <a:srgbClr val="D7E5E8"/>
+            </a:solidFill>
+            <a:prstDash val="solid"/>
+          </a:ln>
+        </p:spPr>
+      </p:sp>
+      <p:sp>
+        <p:nvSpPr>
+          <p:cNvPr id="9" name="">
+            <a:extLst xmlns:a="http://schemas.openxmlformats.org/drawingml/2006/main">
+              <a:ext uri="{FF2B5EF4-FFF2-40B4-BE49-F238E27FC236}">
+                <a16:creationId xmlns:a16="http://schemas.microsoft.com/office/drawing/2014/main" id="{9B9CF8C6-2B35-472C-872F-0B5684DAE853}"/>
+              </a:ext>
+            </a:extLst>
+          </p:cNvPr>
+          <p:cNvSpPr>
+            <a:spLocks xmlns:a="http://schemas.openxmlformats.org/drawingml/2006/main" noGrp="1"/>
+          </p:cNvSpPr>
+          <p:nvPr/>
+        </p:nvSpPr>
+        <p:spPr>
+          <a:xfrm xmlns:a="http://schemas.openxmlformats.org/drawingml/2006/main">
+            <a:off x="2590800" y="1914525"/>
+            <a:ext cx="1238250" cy="285750"/>
+          </a:xfrm>
+          <a:prstGeom xmlns:a="http://schemas.openxmlformats.org/drawingml/2006/main" prst="rect">
+            <a:avLst/>
+          </a:prstGeom>
+          <a:noFill xmlns:a="http://schemas.openxmlformats.org/drawingml/2006/main"/>
+          <a:ln xmlns:a="http://schemas.openxmlformats.org/drawingml/2006/main" w="0">
+            <a:noFill/>
+          </a:ln>
+        </p:spPr>
+        <p:txBody>
+          <a:bodyPr xmlns:a="http://schemas.openxmlformats.org/drawingml/2006/main" lIns="0" tIns="0" rIns="0" bIns="0" anchor="ctr">
+            <a:normAutofit fontScale="78125"/>
+          </a:bodyPr>
+          <a:lstStyle xmlns:a="http://schemas.openxmlformats.org/drawingml/2006/main"/>
+          <a:p xmlns:a="http://schemas.openxmlformats.org/drawingml/2006/main">
+            <a:pPr algn="ctr">
+              <a:defRPr sz="1200" b="1">
+                <a:solidFill>
+                  <a:srgbClr val="17344D"/>
+                </a:solidFill>
+                <a:latin typeface="Noto Sans TC"/>
+                <a:ea typeface="Noto Sans TC"/>
+                <a:cs typeface="Noto Sans TC"/>
+              </a:defRPr>
+            </a:pPr>
+            <a:r>
+              <a:rPr sz="1200" b="1">
+                <a:solidFill>
+                  <a:srgbClr val="17344D"/>
+                </a:solidFill>
+                <a:latin typeface="Noto Sans TC"/>
+                <a:ea typeface="Noto Sans TC"/>
+                <a:cs typeface="Noto Sans TC"/>
+              </a:rPr>
+              <a:t>對局收集</a:t>
+            </a:r>
+          </a:p>
+          <a:p xmlns:a="http://schemas.openxmlformats.org/drawingml/2006/main">
+            <a:pPr algn="ctr">
+              <a:defRPr sz="1200" b="1">
+                <a:solidFill>
+                  <a:srgbClr val="17344D"/>
+                </a:solidFill>
+                <a:latin typeface="Noto Sans TC"/>
+                <a:ea typeface="Noto Sans TC"/>
+                <a:cs typeface="Noto Sans TC"/>
+              </a:defRPr>
+            </a:pPr>
+            <a:r>
+              <a:rPr sz="1200" b="1">
+                <a:solidFill>
+                  <a:srgbClr val="17344D"/>
+                </a:solidFill>
+                <a:latin typeface="Noto Sans TC"/>
+                <a:ea typeface="Noto Sans TC"/>
+                <a:cs typeface="Noto Sans TC"/>
+              </a:rPr>
+              <a:t>羽毛</a:t>
+            </a:r>
+          </a:p>
+        </p:txBody>
+      </p:sp>
+      <p:sp>
+        <p:nvSpPr>
+          <p:cNvPr id="10" name="">
+            <a:extLst xmlns:a="http://schemas.openxmlformats.org/drawingml/2006/main">
+              <a:ext uri="{FF2B5EF4-FFF2-40B4-BE49-F238E27FC236}">
+                <a16:creationId xmlns:a16="http://schemas.microsoft.com/office/drawing/2014/main" id="{DF6A16A1-0CDF-4F1A-B496-EBB5C4EEAB2D}"/>
+              </a:ext>
+            </a:extLst>
+          </p:cNvPr>
+          <p:cNvSpPr>
+            <a:spLocks xmlns:a="http://schemas.openxmlformats.org/drawingml/2006/main" noGrp="1"/>
+          </p:cNvSpPr>
+          <p:nvPr/>
+        </p:nvSpPr>
+        <p:spPr>
+          <a:xfrm xmlns:a="http://schemas.openxmlformats.org/drawingml/2006/main">
+            <a:off x="2590800" y="2219325"/>
+            <a:ext cx="1238250" cy="533400"/>
+          </a:xfrm>
+          <a:prstGeom xmlns:a="http://schemas.openxmlformats.org/drawingml/2006/main" prst="rect">
+            <a:avLst/>
+          </a:prstGeom>
+          <a:noFill xmlns:a="http://schemas.openxmlformats.org/drawingml/2006/main"/>
+          <a:ln xmlns:a="http://schemas.openxmlformats.org/drawingml/2006/main" w="0">
+            <a:noFill/>
+          </a:ln>
+        </p:spPr>
+        <p:txBody>
+          <a:bodyPr xmlns:a="http://schemas.openxmlformats.org/drawingml/2006/main" lIns="0" tIns="0" rIns="0" bIns="0" anchor="t">
+            <a:normAutofit fontScale="100000"/>
+          </a:bodyPr>
+          <a:lstStyle xmlns:a="http://schemas.openxmlformats.org/drawingml/2006/main"/>
+          <a:p xmlns:a="http://schemas.openxmlformats.org/drawingml/2006/main">
+            <a:pPr algn="ctr">
+              <a:defRPr sz="825" b="0">
+                <a:solidFill>
+                  <a:srgbClr val="657784"/>
+                </a:solidFill>
+                <a:latin typeface="Noto Sans TC"/>
+                <a:ea typeface="Noto Sans TC"/>
+                <a:cs typeface="Noto Sans TC"/>
+              </a:defRPr>
+            </a:pPr>
+            <a:r>
+              <a:rPr sz="825" b="0">
+                <a:solidFill>
+                  <a:srgbClr val="657784"/>
+                </a:solidFill>
+                <a:latin typeface="Noto Sans TC"/>
+                <a:ea typeface="Noto Sans TC"/>
+                <a:cs typeface="Noto Sans TC"/>
+              </a:rPr>
+              <a:t>羽毛轉換為</a:t>
+            </a:r>
+          </a:p>
+          <a:p xmlns:a="http://schemas.openxmlformats.org/drawingml/2006/main">
+            <a:pPr algn="ctr">
+              <a:defRPr sz="825" b="0">
+                <a:solidFill>
+                  <a:srgbClr val="657784"/>
+                </a:solidFill>
+                <a:latin typeface="Noto Sans TC"/>
+                <a:ea typeface="Noto Sans TC"/>
+                <a:cs typeface="Noto Sans TC"/>
+              </a:defRPr>
+            </a:pPr>
+            <a:r>
+              <a:rPr sz="825" b="0">
+                <a:solidFill>
+                  <a:srgbClr val="657784"/>
+                </a:solidFill>
+                <a:latin typeface="Noto Sans TC"/>
+                <a:ea typeface="Noto Sans TC"/>
+                <a:cs typeface="Noto Sans TC"/>
+              </a:rPr>
+              <a:t>轉蛋進度</a:t>
+            </a:r>
+          </a:p>
+        </p:txBody>
+      </p:sp>
+      <p:sp>
+        <p:nvSpPr>
+          <p:cNvPr id="11" name="">
+            <a:extLst xmlns:a="http://schemas.openxmlformats.org/drawingml/2006/main">
+              <a:ext uri="{FF2B5EF4-FFF2-40B4-BE49-F238E27FC236}">
+                <a16:creationId xmlns:a16="http://schemas.microsoft.com/office/drawing/2014/main" id="{BBD1DFC6-5C82-4E70-9D3C-810A1D3EA386}"/>
+              </a:ext>
+            </a:extLst>
+          </p:cNvPr>
+          <p:cNvSpPr>
+            <a:spLocks xmlns:a="http://schemas.openxmlformats.org/drawingml/2006/main" noGrp="1"/>
+          </p:cNvSpPr>
+          <p:nvPr/>
+        </p:nvSpPr>
+        <p:spPr>
+          <a:xfrm xmlns:a="http://schemas.openxmlformats.org/drawingml/2006/main">
+            <a:off x="2647950" y="2705100"/>
+            <a:ext cx="1123950" cy="38100"/>
+          </a:xfrm>
+          <a:prstGeom xmlns:a="http://schemas.openxmlformats.org/drawingml/2006/main" prst="roundRect">
+            <a:avLst>
+              <a:gd name="adj" fmla="val 50000"/>
+            </a:avLst>
+          </a:prstGeom>
+          <a:solidFill xmlns:a="http://schemas.openxmlformats.org/drawingml/2006/main">
+            <a:srgbClr val="2F9BD3"/>
+          </a:solidFill>
+          <a:ln xmlns:a="http://schemas.openxmlformats.org/drawingml/2006/main" w="0">
+            <a:noFill/>
+          </a:ln>
+        </p:spPr>
+      </p:sp>
+      <p:sp>
+        <p:nvSpPr>
+          <p:cNvPr id="12" name="">
+            <a:extLst xmlns:a="http://schemas.openxmlformats.org/drawingml/2006/main">
+              <a:ext uri="{FF2B5EF4-FFF2-40B4-BE49-F238E27FC236}">
+                <a16:creationId xmlns:a16="http://schemas.microsoft.com/office/drawing/2014/main" id="{A6B22BD8-3160-492C-840E-A9E13C137CAD}"/>
+              </a:ext>
+            </a:extLst>
+          </p:cNvPr>
+          <p:cNvSpPr>
+            <a:spLocks xmlns:a="http://schemas.openxmlformats.org/drawingml/2006/main" noGrp="1"/>
+          </p:cNvSpPr>
+          <p:nvPr/>
+        </p:nvSpPr>
+        <p:spPr>
+          <a:xfrm xmlns:a="http://schemas.openxmlformats.org/drawingml/2006/main">
+            <a:off x="4286250" y="1809750"/>
+            <a:ext cx="1428750" cy="990600"/>
+          </a:xfrm>
+          <a:prstGeom xmlns:a="http://schemas.openxmlformats.org/drawingml/2006/main" prst="roundRect">
+            <a:avLst>
+              <a:gd name="adj" fmla="val 7692"/>
+            </a:avLst>
+          </a:prstGeom>
+          <a:solidFill xmlns:a="http://schemas.openxmlformats.org/drawingml/2006/main">
+            <a:srgbClr val="FFFFFF"/>
+          </a:solidFill>
+          <a:ln xmlns:a="http://schemas.openxmlformats.org/drawingml/2006/main" w="9525">
+            <a:solidFill>
+              <a:srgbClr val="D7E5E8"/>
+            </a:solidFill>
+            <a:prstDash val="solid"/>
+          </a:ln>
+        </p:spPr>
+      </p:sp>
+      <p:sp>
+        <p:nvSpPr>
+          <p:cNvPr id="13" name="">
+            <a:extLst xmlns:a="http://schemas.openxmlformats.org/drawingml/2006/main">
+              <a:ext uri="{FF2B5EF4-FFF2-40B4-BE49-F238E27FC236}">
+                <a16:creationId xmlns:a16="http://schemas.microsoft.com/office/drawing/2014/main" id="{43FFC7D0-4D75-431F-BF34-F887B5F343E3}"/>
+              </a:ext>
+            </a:extLst>
+          </p:cNvPr>
+          <p:cNvSpPr>
+            <a:spLocks xmlns:a="http://schemas.openxmlformats.org/drawingml/2006/main" noGrp="1"/>
+          </p:cNvSpPr>
+          <p:nvPr/>
+        </p:nvSpPr>
+        <p:spPr>
+          <a:xfrm xmlns:a="http://schemas.openxmlformats.org/drawingml/2006/main">
+            <a:off x="4381500" y="1914525"/>
+            <a:ext cx="1238250" cy="285750"/>
           </a:xfrm>
           <a:prstGeom xmlns:a="http://schemas.openxmlformats.org/drawingml/2006/main" prst="rect">
             <a:avLst/>
@@ -11844,7 +12412,64 @@
           </a:bodyPr>
           <a:lstStyle xmlns:a="http://schemas.openxmlformats.org/drawingml/2006/main"/>
           <a:p xmlns:a="http://schemas.openxmlformats.org/drawingml/2006/main">
-            <a:pPr algn="l">
+            <a:pPr algn="ctr">
+              <a:defRPr sz="1200" b="1">
+                <a:solidFill>
+                  <a:srgbClr val="17344D"/>
+                </a:solidFill>
+                <a:latin typeface="Noto Sans TC"/>
+                <a:ea typeface="Noto Sans TC"/>
+                <a:cs typeface="Noto Sans TC"/>
+              </a:defRPr>
+            </a:pPr>
+            <a:r>
+              <a:rPr sz="1200" b="1">
+                <a:solidFill>
+                  <a:srgbClr val="17344D"/>
+                </a:solidFill>
+                <a:latin typeface="Noto Sans TC"/>
+                <a:ea typeface="Noto Sans TC"/>
+                <a:cs typeface="Noto Sans TC"/>
+              </a:rPr>
+              <a:t>評價加成</a:t>
+            </a:r>
+          </a:p>
+        </p:txBody>
+      </p:sp>
+      <p:sp>
+        <p:nvSpPr>
+          <p:cNvPr id="14" name="">
+            <a:extLst xmlns:a="http://schemas.openxmlformats.org/drawingml/2006/main">
+              <a:ext uri="{FF2B5EF4-FFF2-40B4-BE49-F238E27FC236}">
+                <a16:creationId xmlns:a16="http://schemas.microsoft.com/office/drawing/2014/main" id="{09C704B4-13B5-4EE1-AE89-51265E3B5F3D}"/>
+              </a:ext>
+            </a:extLst>
+          </p:cNvPr>
+          <p:cNvSpPr>
+            <a:spLocks xmlns:a="http://schemas.openxmlformats.org/drawingml/2006/main" noGrp="1"/>
+          </p:cNvSpPr>
+          <p:nvPr/>
+        </p:nvSpPr>
+        <p:spPr>
+          <a:xfrm xmlns:a="http://schemas.openxmlformats.org/drawingml/2006/main">
+            <a:off x="4381500" y="2219325"/>
+            <a:ext cx="1238250" cy="533400"/>
+          </a:xfrm>
+          <a:prstGeom xmlns:a="http://schemas.openxmlformats.org/drawingml/2006/main" prst="rect">
+            <a:avLst/>
+          </a:prstGeom>
+          <a:noFill xmlns:a="http://schemas.openxmlformats.org/drawingml/2006/main"/>
+          <a:ln xmlns:a="http://schemas.openxmlformats.org/drawingml/2006/main" w="0">
+            <a:noFill/>
+          </a:ln>
+        </p:spPr>
+        <p:txBody>
+          <a:bodyPr xmlns:a="http://schemas.openxmlformats.org/drawingml/2006/main" lIns="0" tIns="0" rIns="0" bIns="0" anchor="t">
+            <a:normAutofit fontScale="100000"/>
+          </a:bodyPr>
+          <a:lstStyle xmlns:a="http://schemas.openxmlformats.org/drawingml/2006/main"/>
+          <a:p xmlns:a="http://schemas.openxmlformats.org/drawingml/2006/main">
+            <a:pPr algn="ctr">
               <a:defRPr sz="825" b="0">
                 <a:solidFill>
                   <a:srgbClr val="657784"/>
@@ -11863,29 +12488,346 @@
                 <a:ea typeface="Noto Sans TC"/>
                 <a:cs typeface="Noto Sans TC"/>
               </a:rPr>
-              <a:t>Traffic Bird｜5 人多人派對玩法擴充提案</a:t>
-            </a:r>
-          </a:p>
-        </p:txBody>
-      </p:sp>
-      <p:sp>
-        <p:nvSpPr>
-          <p:cNvPr id="8" name="">
-            <a:extLst xmlns:a="http://schemas.openxmlformats.org/drawingml/2006/main">
-              <a:ext uri="{FF2B5EF4-FFF2-40B4-BE49-F238E27FC236}">
-                <a16:creationId xmlns:a16="http://schemas.microsoft.com/office/drawing/2014/main" id="{DFEF1C22-E1DC-44E7-A2E8-566B09793989}"/>
-              </a:ext>
-            </a:extLst>
-          </p:cNvPr>
-          <p:cNvSpPr>
-            <a:spLocks xmlns:a="http://schemas.openxmlformats.org/drawingml/2006/main" noGrp="1"/>
-          </p:cNvSpPr>
-          <p:nvPr/>
-        </p:nvSpPr>
-        <p:spPr>
-          <a:xfrm xmlns:a="http://schemas.openxmlformats.org/drawingml/2006/main">
-            <a:off x="10953750" y="6467475"/>
-            <a:ext cx="514350" cy="171450"/>
+              <a:t>依前進步數結算</a:t>
+            </a:r>
+          </a:p>
+          <a:p xmlns:a="http://schemas.openxmlformats.org/drawingml/2006/main">
+            <a:pPr algn="ctr">
+              <a:defRPr sz="825" b="0">
+                <a:solidFill>
+                  <a:srgbClr val="657784"/>
+                </a:solidFill>
+                <a:latin typeface="Noto Sans TC"/>
+                <a:ea typeface="Noto Sans TC"/>
+                <a:cs typeface="Noto Sans TC"/>
+              </a:defRPr>
+            </a:pPr>
+            <a:r>
+              <a:rPr sz="825" b="0">
+                <a:solidFill>
+                  <a:srgbClr val="657784"/>
+                </a:solidFill>
+                <a:latin typeface="Noto Sans TC"/>
+                <a:ea typeface="Noto Sans TC"/>
+                <a:cs typeface="Noto Sans TC"/>
+              </a:rPr>
+              <a:t>S／SS／SSS 提高進度</a:t>
+            </a:r>
+          </a:p>
+        </p:txBody>
+      </p:sp>
+      <p:sp>
+        <p:nvSpPr>
+          <p:cNvPr id="15" name="">
+            <a:extLst xmlns:a="http://schemas.openxmlformats.org/drawingml/2006/main">
+              <a:ext uri="{FF2B5EF4-FFF2-40B4-BE49-F238E27FC236}">
+                <a16:creationId xmlns:a16="http://schemas.microsoft.com/office/drawing/2014/main" id="{DD42D094-78CB-4253-9E05-616C6C8DB6EB}"/>
+              </a:ext>
+            </a:extLst>
+          </p:cNvPr>
+          <p:cNvSpPr>
+            <a:spLocks xmlns:a="http://schemas.openxmlformats.org/drawingml/2006/main" noGrp="1"/>
+          </p:cNvSpPr>
+          <p:nvPr/>
+        </p:nvSpPr>
+        <p:spPr>
+          <a:xfrm xmlns:a="http://schemas.openxmlformats.org/drawingml/2006/main">
+            <a:off x="4438650" y="2705100"/>
+            <a:ext cx="1123950" cy="38100"/>
+          </a:xfrm>
+          <a:prstGeom xmlns:a="http://schemas.openxmlformats.org/drawingml/2006/main" prst="roundRect">
+            <a:avLst>
+              <a:gd name="adj" fmla="val 50000"/>
+            </a:avLst>
+          </a:prstGeom>
+          <a:solidFill xmlns:a="http://schemas.openxmlformats.org/drawingml/2006/main">
+            <a:srgbClr val="F8C449"/>
+          </a:solidFill>
+          <a:ln xmlns:a="http://schemas.openxmlformats.org/drawingml/2006/main" w="0">
+            <a:noFill/>
+          </a:ln>
+        </p:spPr>
+      </p:sp>
+      <p:sp>
+        <p:nvSpPr>
+          <p:cNvPr id="16" name="">
+            <a:extLst xmlns:a="http://schemas.openxmlformats.org/drawingml/2006/main">
+              <a:ext uri="{FF2B5EF4-FFF2-40B4-BE49-F238E27FC236}">
+                <a16:creationId xmlns:a16="http://schemas.microsoft.com/office/drawing/2014/main" id="{176C962E-D209-4AD0-8535-B8DA73410961}"/>
+              </a:ext>
+            </a:extLst>
+          </p:cNvPr>
+          <p:cNvSpPr>
+            <a:spLocks xmlns:a="http://schemas.openxmlformats.org/drawingml/2006/main" noGrp="1"/>
+          </p:cNvSpPr>
+          <p:nvPr/>
+        </p:nvSpPr>
+        <p:spPr>
+          <a:xfrm xmlns:a="http://schemas.openxmlformats.org/drawingml/2006/main">
+            <a:off x="6076950" y="1809750"/>
+            <a:ext cx="1428750" cy="990600"/>
+          </a:xfrm>
+          <a:prstGeom xmlns:a="http://schemas.openxmlformats.org/drawingml/2006/main" prst="roundRect">
+            <a:avLst>
+              <a:gd name="adj" fmla="val 7692"/>
+            </a:avLst>
+          </a:prstGeom>
+          <a:solidFill xmlns:a="http://schemas.openxmlformats.org/drawingml/2006/main">
+            <a:srgbClr val="F0FBFB"/>
+          </a:solidFill>
+          <a:ln xmlns:a="http://schemas.openxmlformats.org/drawingml/2006/main" w="9525">
+            <a:solidFill>
+              <a:srgbClr val="D7E5E8"/>
+            </a:solidFill>
+            <a:prstDash val="solid"/>
+          </a:ln>
+        </p:spPr>
+      </p:sp>
+      <p:sp>
+        <p:nvSpPr>
+          <p:cNvPr id="17" name="">
+            <a:extLst xmlns:a="http://schemas.openxmlformats.org/drawingml/2006/main">
+              <a:ext uri="{FF2B5EF4-FFF2-40B4-BE49-F238E27FC236}">
+                <a16:creationId xmlns:a16="http://schemas.microsoft.com/office/drawing/2014/main" id="{7FFF1834-BB23-42B4-A29F-7F1BF9F665E8}"/>
+              </a:ext>
+            </a:extLst>
+          </p:cNvPr>
+          <p:cNvSpPr>
+            <a:spLocks xmlns:a="http://schemas.openxmlformats.org/drawingml/2006/main" noGrp="1"/>
+          </p:cNvSpPr>
+          <p:nvPr/>
+        </p:nvSpPr>
+        <p:spPr>
+          <a:xfrm xmlns:a="http://schemas.openxmlformats.org/drawingml/2006/main">
+            <a:off x="6172200" y="1914525"/>
+            <a:ext cx="1238250" cy="285750"/>
+          </a:xfrm>
+          <a:prstGeom xmlns:a="http://schemas.openxmlformats.org/drawingml/2006/main" prst="rect">
+            <a:avLst/>
+          </a:prstGeom>
+          <a:noFill xmlns:a="http://schemas.openxmlformats.org/drawingml/2006/main"/>
+          <a:ln xmlns:a="http://schemas.openxmlformats.org/drawingml/2006/main" w="0">
+            <a:noFill/>
+          </a:ln>
+        </p:spPr>
+        <p:txBody>
+          <a:bodyPr xmlns:a="http://schemas.openxmlformats.org/drawingml/2006/main" lIns="0" tIns="0" rIns="0" bIns="0" anchor="ctr">
+            <a:normAutofit fontScale="78125"/>
+          </a:bodyPr>
+          <a:lstStyle xmlns:a="http://schemas.openxmlformats.org/drawingml/2006/main"/>
+          <a:p xmlns:a="http://schemas.openxmlformats.org/drawingml/2006/main">
+            <a:pPr algn="ctr">
+              <a:defRPr sz="1200" b="1">
+                <a:solidFill>
+                  <a:srgbClr val="17344D"/>
+                </a:solidFill>
+                <a:latin typeface="Noto Sans TC"/>
+                <a:ea typeface="Noto Sans TC"/>
+                <a:cs typeface="Noto Sans TC"/>
+              </a:defRPr>
+            </a:pPr>
+            <a:r>
+              <a:rPr sz="1200" b="1">
+                <a:solidFill>
+                  <a:srgbClr val="17344D"/>
+                </a:solidFill>
+                <a:latin typeface="Noto Sans TC"/>
+                <a:ea typeface="Noto Sans TC"/>
+                <a:cs typeface="Noto Sans TC"/>
+              </a:rPr>
+              <a:t>累積轉蛋</a:t>
+            </a:r>
+          </a:p>
+          <a:p xmlns:a="http://schemas.openxmlformats.org/drawingml/2006/main">
+            <a:pPr algn="ctr">
+              <a:defRPr sz="1200" b="1">
+                <a:solidFill>
+                  <a:srgbClr val="17344D"/>
+                </a:solidFill>
+                <a:latin typeface="Noto Sans TC"/>
+                <a:ea typeface="Noto Sans TC"/>
+                <a:cs typeface="Noto Sans TC"/>
+              </a:defRPr>
+            </a:pPr>
+            <a:r>
+              <a:rPr sz="1200" b="1">
+                <a:solidFill>
+                  <a:srgbClr val="17344D"/>
+                </a:solidFill>
+                <a:latin typeface="Noto Sans TC"/>
+                <a:ea typeface="Noto Sans TC"/>
+                <a:cs typeface="Noto Sans TC"/>
+              </a:rPr>
+              <a:t>進度</a:t>
+            </a:r>
+          </a:p>
+        </p:txBody>
+      </p:sp>
+      <p:sp>
+        <p:nvSpPr>
+          <p:cNvPr id="18" name="">
+            <a:extLst xmlns:a="http://schemas.openxmlformats.org/drawingml/2006/main">
+              <a:ext uri="{FF2B5EF4-FFF2-40B4-BE49-F238E27FC236}">
+                <a16:creationId xmlns:a16="http://schemas.microsoft.com/office/drawing/2014/main" id="{A75B93F6-EE32-4ADA-BA10-6F014DEDD215}"/>
+              </a:ext>
+            </a:extLst>
+          </p:cNvPr>
+          <p:cNvSpPr>
+            <a:spLocks xmlns:a="http://schemas.openxmlformats.org/drawingml/2006/main" noGrp="1"/>
+          </p:cNvSpPr>
+          <p:nvPr/>
+        </p:nvSpPr>
+        <p:spPr>
+          <a:xfrm xmlns:a="http://schemas.openxmlformats.org/drawingml/2006/main">
+            <a:off x="6172200" y="2219325"/>
+            <a:ext cx="1238250" cy="533400"/>
+          </a:xfrm>
+          <a:prstGeom xmlns:a="http://schemas.openxmlformats.org/drawingml/2006/main" prst="rect">
+            <a:avLst/>
+          </a:prstGeom>
+          <a:noFill xmlns:a="http://schemas.openxmlformats.org/drawingml/2006/main"/>
+          <a:ln xmlns:a="http://schemas.openxmlformats.org/drawingml/2006/main" w="0">
+            <a:noFill/>
+          </a:ln>
+        </p:spPr>
+        <p:txBody>
+          <a:bodyPr xmlns:a="http://schemas.openxmlformats.org/drawingml/2006/main" lIns="0" tIns="0" rIns="0" bIns="0" anchor="t">
+            <a:normAutofit fontScale="100000"/>
+          </a:bodyPr>
+          <a:lstStyle xmlns:a="http://schemas.openxmlformats.org/drawingml/2006/main"/>
+          <a:p xmlns:a="http://schemas.openxmlformats.org/drawingml/2006/main">
+            <a:pPr algn="ctr">
+              <a:defRPr sz="825" b="0">
+                <a:solidFill>
+                  <a:srgbClr val="657784"/>
+                </a:solidFill>
+                <a:latin typeface="Noto Sans TC"/>
+                <a:ea typeface="Noto Sans TC"/>
+                <a:cs typeface="Noto Sans TC"/>
+              </a:defRPr>
+            </a:pPr>
+            <a:r>
+              <a:rPr sz="825" b="0">
+                <a:solidFill>
+                  <a:srgbClr val="657784"/>
+                </a:solidFill>
+                <a:latin typeface="Noto Sans TC"/>
+                <a:ea typeface="Noto Sans TC"/>
+                <a:cs typeface="Noto Sans TC"/>
+              </a:rPr>
+              <a:t>達 100% 即可</a:t>
+            </a:r>
+          </a:p>
+          <a:p xmlns:a="http://schemas.openxmlformats.org/drawingml/2006/main">
+            <a:pPr algn="ctr">
+              <a:defRPr sz="825" b="0">
+                <a:solidFill>
+                  <a:srgbClr val="657784"/>
+                </a:solidFill>
+                <a:latin typeface="Noto Sans TC"/>
+                <a:ea typeface="Noto Sans TC"/>
+                <a:cs typeface="Noto Sans TC"/>
+              </a:defRPr>
+            </a:pPr>
+            <a:r>
+              <a:rPr sz="825" b="0">
+                <a:solidFill>
+                  <a:srgbClr val="657784"/>
+                </a:solidFill>
+                <a:latin typeface="Noto Sans TC"/>
+                <a:ea typeface="Noto Sans TC"/>
+                <a:cs typeface="Noto Sans TC"/>
+              </a:rPr>
+              <a:t>免費轉蛋 1 次</a:t>
+            </a:r>
+          </a:p>
+        </p:txBody>
+      </p:sp>
+      <p:sp>
+        <p:nvSpPr>
+          <p:cNvPr id="19" name="">
+            <a:extLst xmlns:a="http://schemas.openxmlformats.org/drawingml/2006/main">
+              <a:ext uri="{FF2B5EF4-FFF2-40B4-BE49-F238E27FC236}">
+                <a16:creationId xmlns:a16="http://schemas.microsoft.com/office/drawing/2014/main" id="{4C6658E9-FA5E-4EF9-B192-17C23C97693F}"/>
+              </a:ext>
+            </a:extLst>
+          </p:cNvPr>
+          <p:cNvSpPr>
+            <a:spLocks xmlns:a="http://schemas.openxmlformats.org/drawingml/2006/main" noGrp="1"/>
+          </p:cNvSpPr>
+          <p:nvPr/>
+        </p:nvSpPr>
+        <p:spPr>
+          <a:xfrm xmlns:a="http://schemas.openxmlformats.org/drawingml/2006/main">
+            <a:off x="6229350" y="2705100"/>
+            <a:ext cx="1123950" cy="38100"/>
+          </a:xfrm>
+          <a:prstGeom xmlns:a="http://schemas.openxmlformats.org/drawingml/2006/main" prst="roundRect">
+            <a:avLst>
+              <a:gd name="adj" fmla="val 50000"/>
+            </a:avLst>
+          </a:prstGeom>
+          <a:solidFill xmlns:a="http://schemas.openxmlformats.org/drawingml/2006/main">
+            <a:srgbClr val="2F9BD3"/>
+          </a:solidFill>
+          <a:ln xmlns:a="http://schemas.openxmlformats.org/drawingml/2006/main" w="0">
+            <a:noFill/>
+          </a:ln>
+        </p:spPr>
+      </p:sp>
+      <p:sp>
+        <p:nvSpPr>
+          <p:cNvPr id="20" name="">
+            <a:extLst xmlns:a="http://schemas.openxmlformats.org/drawingml/2006/main">
+              <a:ext uri="{FF2B5EF4-FFF2-40B4-BE49-F238E27FC236}">
+                <a16:creationId xmlns:a16="http://schemas.microsoft.com/office/drawing/2014/main" id="{9904A506-1614-45EA-9B5C-47A25D07B095}"/>
+              </a:ext>
+            </a:extLst>
+          </p:cNvPr>
+          <p:cNvSpPr>
+            <a:spLocks xmlns:a="http://schemas.openxmlformats.org/drawingml/2006/main" noGrp="1"/>
+          </p:cNvSpPr>
+          <p:nvPr/>
+        </p:nvSpPr>
+        <p:spPr>
+          <a:xfrm xmlns:a="http://schemas.openxmlformats.org/drawingml/2006/main">
+            <a:off x="7867650" y="1809750"/>
+            <a:ext cx="1428750" cy="990600"/>
+          </a:xfrm>
+          <a:prstGeom xmlns:a="http://schemas.openxmlformats.org/drawingml/2006/main" prst="roundRect">
+            <a:avLst>
+              <a:gd name="adj" fmla="val 7692"/>
+            </a:avLst>
+          </a:prstGeom>
+          <a:solidFill xmlns:a="http://schemas.openxmlformats.org/drawingml/2006/main">
+            <a:srgbClr val="FFFFFF"/>
+          </a:solidFill>
+          <a:ln xmlns:a="http://schemas.openxmlformats.org/drawingml/2006/main" w="9525">
+            <a:solidFill>
+              <a:srgbClr val="D7E5E8"/>
+            </a:solidFill>
+            <a:prstDash val="solid"/>
+          </a:ln>
+        </p:spPr>
+      </p:sp>
+      <p:sp>
+        <p:nvSpPr>
+          <p:cNvPr id="21" name="">
+            <a:extLst xmlns:a="http://schemas.openxmlformats.org/drawingml/2006/main">
+              <a:ext uri="{FF2B5EF4-FFF2-40B4-BE49-F238E27FC236}">
+                <a16:creationId xmlns:a16="http://schemas.microsoft.com/office/drawing/2014/main" id="{4A098DA7-F68E-40F6-8554-1C02FBA75C0A}"/>
+              </a:ext>
+            </a:extLst>
+          </p:cNvPr>
+          <p:cNvSpPr>
+            <a:spLocks xmlns:a="http://schemas.openxmlformats.org/drawingml/2006/main" noGrp="1"/>
+          </p:cNvSpPr>
+          <p:nvPr/>
+        </p:nvSpPr>
+        <p:spPr>
+          <a:xfrm xmlns:a="http://schemas.openxmlformats.org/drawingml/2006/main">
+            <a:off x="7962900" y="1914525"/>
+            <a:ext cx="1238250" cy="285750"/>
           </a:xfrm>
           <a:prstGeom xmlns:a="http://schemas.openxmlformats.org/drawingml/2006/main" prst="rect">
             <a:avLst/>
@@ -11901,6 +12843,1260 @@
           </a:bodyPr>
           <a:lstStyle xmlns:a="http://schemas.openxmlformats.org/drawingml/2006/main"/>
           <a:p xmlns:a="http://schemas.openxmlformats.org/drawingml/2006/main">
+            <a:pPr algn="ctr">
+              <a:defRPr sz="1200" b="1">
+                <a:solidFill>
+                  <a:srgbClr val="17344D"/>
+                </a:solidFill>
+                <a:latin typeface="Noto Sans TC"/>
+                <a:ea typeface="Noto Sans TC"/>
+                <a:cs typeface="Noto Sans TC"/>
+              </a:defRPr>
+            </a:pPr>
+            <a:r>
+              <a:rPr sz="1200" b="1">
+                <a:solidFill>
+                  <a:srgbClr val="17344D"/>
+                </a:solidFill>
+                <a:latin typeface="Noto Sans TC"/>
+                <a:ea typeface="Noto Sans TC"/>
+                <a:cs typeface="Noto Sans TC"/>
+              </a:rPr>
+              <a:t>轉蛋收藏</a:t>
+            </a:r>
+          </a:p>
+        </p:txBody>
+      </p:sp>
+      <p:sp>
+        <p:nvSpPr>
+          <p:cNvPr id="22" name="">
+            <a:extLst xmlns:a="http://schemas.openxmlformats.org/drawingml/2006/main">
+              <a:ext uri="{FF2B5EF4-FFF2-40B4-BE49-F238E27FC236}">
+                <a16:creationId xmlns:a16="http://schemas.microsoft.com/office/drawing/2014/main" id="{40A0DA3C-3590-4BD0-A1B7-D7FAF9C9BF1D}"/>
+              </a:ext>
+            </a:extLst>
+          </p:cNvPr>
+          <p:cNvSpPr>
+            <a:spLocks xmlns:a="http://schemas.openxmlformats.org/drawingml/2006/main" noGrp="1"/>
+          </p:cNvSpPr>
+          <p:nvPr/>
+        </p:nvSpPr>
+        <p:spPr>
+          <a:xfrm xmlns:a="http://schemas.openxmlformats.org/drawingml/2006/main">
+            <a:off x="7962900" y="2219325"/>
+            <a:ext cx="1238250" cy="533400"/>
+          </a:xfrm>
+          <a:prstGeom xmlns:a="http://schemas.openxmlformats.org/drawingml/2006/main" prst="rect">
+            <a:avLst/>
+          </a:prstGeom>
+          <a:noFill xmlns:a="http://schemas.openxmlformats.org/drawingml/2006/main"/>
+          <a:ln xmlns:a="http://schemas.openxmlformats.org/drawingml/2006/main" w="0">
+            <a:noFill/>
+          </a:ln>
+        </p:spPr>
+        <p:txBody>
+          <a:bodyPr xmlns:a="http://schemas.openxmlformats.org/drawingml/2006/main" lIns="0" tIns="0" rIns="0" bIns="0" anchor="t">
+            <a:normAutofit fontScale="100000"/>
+          </a:bodyPr>
+          <a:lstStyle xmlns:a="http://schemas.openxmlformats.org/drawingml/2006/main"/>
+          <a:p xmlns:a="http://schemas.openxmlformats.org/drawingml/2006/main">
+            <a:pPr algn="ctr">
+              <a:defRPr sz="825" b="0">
+                <a:solidFill>
+                  <a:srgbClr val="657784"/>
+                </a:solidFill>
+                <a:latin typeface="Noto Sans TC"/>
+                <a:ea typeface="Noto Sans TC"/>
+                <a:cs typeface="Noto Sans TC"/>
+              </a:defRPr>
+            </a:pPr>
+            <a:r>
+              <a:rPr sz="825" b="0">
+                <a:solidFill>
+                  <a:srgbClr val="657784"/>
+                </a:solidFill>
+                <a:latin typeface="Noto Sans TC"/>
+                <a:ea typeface="Noto Sans TC"/>
+                <a:cs typeface="Noto Sans TC"/>
+              </a:rPr>
+              <a:t>角色、造型、</a:t>
+            </a:r>
+          </a:p>
+          <a:p xmlns:a="http://schemas.openxmlformats.org/drawingml/2006/main">
+            <a:pPr algn="ctr">
+              <a:defRPr sz="825" b="0">
+                <a:solidFill>
+                  <a:srgbClr val="657784"/>
+                </a:solidFill>
+                <a:latin typeface="Noto Sans TC"/>
+                <a:ea typeface="Noto Sans TC"/>
+                <a:cs typeface="Noto Sans TC"/>
+              </a:defRPr>
+            </a:pPr>
+            <a:r>
+              <a:rPr sz="825" b="0">
+                <a:solidFill>
+                  <a:srgbClr val="657784"/>
+                </a:solidFill>
+                <a:latin typeface="Noto Sans TC"/>
+                <a:ea typeface="Noto Sans TC"/>
+                <a:cs typeface="Noto Sans TC"/>
+              </a:rPr>
+              <a:t>表情、特效</a:t>
+            </a:r>
+          </a:p>
+        </p:txBody>
+      </p:sp>
+      <p:sp>
+        <p:nvSpPr>
+          <p:cNvPr id="23" name="">
+            <a:extLst xmlns:a="http://schemas.openxmlformats.org/drawingml/2006/main">
+              <a:ext uri="{FF2B5EF4-FFF2-40B4-BE49-F238E27FC236}">
+                <a16:creationId xmlns:a16="http://schemas.microsoft.com/office/drawing/2014/main" id="{DE6BE706-DB95-4D77-8E94-2608C3FB41E3}"/>
+              </a:ext>
+            </a:extLst>
+          </p:cNvPr>
+          <p:cNvSpPr>
+            <a:spLocks xmlns:a="http://schemas.openxmlformats.org/drawingml/2006/main" noGrp="1"/>
+          </p:cNvSpPr>
+          <p:nvPr/>
+        </p:nvSpPr>
+        <p:spPr>
+          <a:xfrm xmlns:a="http://schemas.openxmlformats.org/drawingml/2006/main">
+            <a:off x="8020050" y="2705100"/>
+            <a:ext cx="1123950" cy="38100"/>
+          </a:xfrm>
+          <a:prstGeom xmlns:a="http://schemas.openxmlformats.org/drawingml/2006/main" prst="roundRect">
+            <a:avLst>
+              <a:gd name="adj" fmla="val 50000"/>
+            </a:avLst>
+          </a:prstGeom>
+          <a:solidFill xmlns:a="http://schemas.openxmlformats.org/drawingml/2006/main">
+            <a:srgbClr val="F59B4C"/>
+          </a:solidFill>
+          <a:ln xmlns:a="http://schemas.openxmlformats.org/drawingml/2006/main" w="0">
+            <a:noFill/>
+          </a:ln>
+        </p:spPr>
+      </p:sp>
+      <p:sp>
+        <p:nvSpPr>
+          <p:cNvPr id="24" name="">
+            <a:extLst xmlns:a="http://schemas.openxmlformats.org/drawingml/2006/main">
+              <a:ext uri="{FF2B5EF4-FFF2-40B4-BE49-F238E27FC236}">
+                <a16:creationId xmlns:a16="http://schemas.microsoft.com/office/drawing/2014/main" id="{9166212E-6F82-4174-80AF-AFA21C15BD5F}"/>
+              </a:ext>
+            </a:extLst>
+          </p:cNvPr>
+          <p:cNvSpPr>
+            <a:spLocks xmlns:a="http://schemas.openxmlformats.org/drawingml/2006/main" noGrp="1"/>
+          </p:cNvSpPr>
+          <p:nvPr/>
+        </p:nvSpPr>
+        <p:spPr>
+          <a:xfrm xmlns:a="http://schemas.openxmlformats.org/drawingml/2006/main">
+            <a:off x="9658350" y="1809750"/>
+            <a:ext cx="1428750" cy="990600"/>
+          </a:xfrm>
+          <a:prstGeom xmlns:a="http://schemas.openxmlformats.org/drawingml/2006/main" prst="roundRect">
+            <a:avLst>
+              <a:gd name="adj" fmla="val 7692"/>
+            </a:avLst>
+          </a:prstGeom>
+          <a:solidFill xmlns:a="http://schemas.openxmlformats.org/drawingml/2006/main">
+            <a:srgbClr val="F0FBFB"/>
+          </a:solidFill>
+          <a:ln xmlns:a="http://schemas.openxmlformats.org/drawingml/2006/main" w="9525">
+            <a:solidFill>
+              <a:srgbClr val="D7E5E8"/>
+            </a:solidFill>
+            <a:prstDash val="solid"/>
+          </a:ln>
+        </p:spPr>
+      </p:sp>
+      <p:sp>
+        <p:nvSpPr>
+          <p:cNvPr id="25" name="">
+            <a:extLst xmlns:a="http://schemas.openxmlformats.org/drawingml/2006/main">
+              <a:ext uri="{FF2B5EF4-FFF2-40B4-BE49-F238E27FC236}">
+                <a16:creationId xmlns:a16="http://schemas.microsoft.com/office/drawing/2014/main" id="{81276F19-DF75-4054-AADE-4C3D097F977F}"/>
+              </a:ext>
+            </a:extLst>
+          </p:cNvPr>
+          <p:cNvSpPr>
+            <a:spLocks xmlns:a="http://schemas.openxmlformats.org/drawingml/2006/main" noGrp="1"/>
+          </p:cNvSpPr>
+          <p:nvPr/>
+        </p:nvSpPr>
+        <p:spPr>
+          <a:xfrm xmlns:a="http://schemas.openxmlformats.org/drawingml/2006/main">
+            <a:off x="9753600" y="1914525"/>
+            <a:ext cx="1238250" cy="285750"/>
+          </a:xfrm>
+          <a:prstGeom xmlns:a="http://schemas.openxmlformats.org/drawingml/2006/main" prst="rect">
+            <a:avLst/>
+          </a:prstGeom>
+          <a:noFill xmlns:a="http://schemas.openxmlformats.org/drawingml/2006/main"/>
+          <a:ln xmlns:a="http://schemas.openxmlformats.org/drawingml/2006/main" w="0">
+            <a:noFill/>
+          </a:ln>
+        </p:spPr>
+        <p:txBody>
+          <a:bodyPr xmlns:a="http://schemas.openxmlformats.org/drawingml/2006/main" lIns="0" tIns="0" rIns="0" bIns="0" anchor="ctr">
+            <a:normAutofit fontScale="100000"/>
+          </a:bodyPr>
+          <a:lstStyle xmlns:a="http://schemas.openxmlformats.org/drawingml/2006/main"/>
+          <a:p xmlns:a="http://schemas.openxmlformats.org/drawingml/2006/main">
+            <a:pPr algn="ctr">
+              <a:defRPr sz="1200" b="1">
+                <a:solidFill>
+                  <a:srgbClr val="17344D"/>
+                </a:solidFill>
+                <a:latin typeface="Noto Sans TC"/>
+                <a:ea typeface="Noto Sans TC"/>
+                <a:cs typeface="Noto Sans TC"/>
+              </a:defRPr>
+            </a:pPr>
+            <a:r>
+              <a:rPr sz="1200" b="1">
+                <a:solidFill>
+                  <a:srgbClr val="17344D"/>
+                </a:solidFill>
+                <a:latin typeface="Noto Sans TC"/>
+                <a:ea typeface="Noto Sans TC"/>
+                <a:cs typeface="Noto Sans TC"/>
+              </a:rPr>
+              <a:t>再次遊玩</a:t>
+            </a:r>
+          </a:p>
+        </p:txBody>
+      </p:sp>
+      <p:sp>
+        <p:nvSpPr>
+          <p:cNvPr id="26" name="">
+            <a:extLst xmlns:a="http://schemas.openxmlformats.org/drawingml/2006/main">
+              <a:ext uri="{FF2B5EF4-FFF2-40B4-BE49-F238E27FC236}">
+                <a16:creationId xmlns:a16="http://schemas.microsoft.com/office/drawing/2014/main" id="{934BD5EC-8EDF-4C6D-9216-4B99C811FEB9}"/>
+              </a:ext>
+            </a:extLst>
+          </p:cNvPr>
+          <p:cNvSpPr>
+            <a:spLocks xmlns:a="http://schemas.openxmlformats.org/drawingml/2006/main" noGrp="1"/>
+          </p:cNvSpPr>
+          <p:nvPr/>
+        </p:nvSpPr>
+        <p:spPr>
+          <a:xfrm xmlns:a="http://schemas.openxmlformats.org/drawingml/2006/main">
+            <a:off x="9753600" y="2219325"/>
+            <a:ext cx="1238250" cy="533400"/>
+          </a:xfrm>
+          <a:prstGeom xmlns:a="http://schemas.openxmlformats.org/drawingml/2006/main" prst="rect">
+            <a:avLst/>
+          </a:prstGeom>
+          <a:noFill xmlns:a="http://schemas.openxmlformats.org/drawingml/2006/main"/>
+          <a:ln xmlns:a="http://schemas.openxmlformats.org/drawingml/2006/main" w="0">
+            <a:noFill/>
+          </a:ln>
+        </p:spPr>
+        <p:txBody>
+          <a:bodyPr xmlns:a="http://schemas.openxmlformats.org/drawingml/2006/main" lIns="0" tIns="0" rIns="0" bIns="0" anchor="t">
+            <a:normAutofit fontScale="100000"/>
+          </a:bodyPr>
+          <a:lstStyle xmlns:a="http://schemas.openxmlformats.org/drawingml/2006/main"/>
+          <a:p xmlns:a="http://schemas.openxmlformats.org/drawingml/2006/main">
+            <a:pPr algn="ctr">
+              <a:defRPr sz="825" b="0">
+                <a:solidFill>
+                  <a:srgbClr val="657784"/>
+                </a:solidFill>
+                <a:latin typeface="Noto Sans TC"/>
+                <a:ea typeface="Noto Sans TC"/>
+                <a:cs typeface="Noto Sans TC"/>
+              </a:defRPr>
+            </a:pPr>
+            <a:r>
+              <a:rPr sz="825" b="0">
+                <a:solidFill>
+                  <a:srgbClr val="657784"/>
+                </a:solidFill>
+                <a:latin typeface="Noto Sans TC"/>
+                <a:ea typeface="Noto Sans TC"/>
+                <a:cs typeface="Noto Sans TC"/>
+              </a:rPr>
+              <a:t>收藏帶回多人對局</a:t>
+            </a:r>
+          </a:p>
+          <a:p xmlns:a="http://schemas.openxmlformats.org/drawingml/2006/main">
+            <a:pPr algn="ctr">
+              <a:defRPr sz="825" b="0">
+                <a:solidFill>
+                  <a:srgbClr val="657784"/>
+                </a:solidFill>
+                <a:latin typeface="Noto Sans TC"/>
+                <a:ea typeface="Noto Sans TC"/>
+                <a:cs typeface="Noto Sans TC"/>
+              </a:defRPr>
+            </a:pPr>
+            <a:r>
+              <a:rPr sz="825" b="0">
+                <a:solidFill>
+                  <a:srgbClr val="657784"/>
+                </a:solidFill>
+                <a:latin typeface="Noto Sans TC"/>
+                <a:ea typeface="Noto Sans TC"/>
+                <a:cs typeface="Noto Sans TC"/>
+              </a:rPr>
+              <a:t>持續展示</a:t>
+            </a:r>
+          </a:p>
+        </p:txBody>
+      </p:sp>
+      <p:sp>
+        <p:nvSpPr>
+          <p:cNvPr id="27" name="">
+            <a:extLst xmlns:a="http://schemas.openxmlformats.org/drawingml/2006/main">
+              <a:ext uri="{FF2B5EF4-FFF2-40B4-BE49-F238E27FC236}">
+                <a16:creationId xmlns:a16="http://schemas.microsoft.com/office/drawing/2014/main" id="{54BBD591-6C57-42C3-BFAD-47FCB4CB5CE8}"/>
+              </a:ext>
+            </a:extLst>
+          </p:cNvPr>
+          <p:cNvSpPr>
+            <a:spLocks xmlns:a="http://schemas.openxmlformats.org/drawingml/2006/main" noGrp="1"/>
+          </p:cNvSpPr>
+          <p:nvPr/>
+        </p:nvSpPr>
+        <p:spPr>
+          <a:xfrm xmlns:a="http://schemas.openxmlformats.org/drawingml/2006/main">
+            <a:off x="9810750" y="2705100"/>
+            <a:ext cx="1123950" cy="38100"/>
+          </a:xfrm>
+          <a:prstGeom xmlns:a="http://schemas.openxmlformats.org/drawingml/2006/main" prst="roundRect">
+            <a:avLst>
+              <a:gd name="adj" fmla="val 50000"/>
+            </a:avLst>
+          </a:prstGeom>
+          <a:solidFill xmlns:a="http://schemas.openxmlformats.org/drawingml/2006/main">
+            <a:srgbClr val="2F9BD3"/>
+          </a:solidFill>
+          <a:ln xmlns:a="http://schemas.openxmlformats.org/drawingml/2006/main" w="0">
+            <a:noFill/>
+          </a:ln>
+        </p:spPr>
+      </p:sp>
+      <p:cxnSp>
+        <p:nvCxnSpPr>
+          <p:cNvPr id="77" name=""/>
+          <p:cNvCxnSpPr>
+            <a:stCxn xmlns:a="http://schemas.openxmlformats.org/drawingml/2006/main" id="4" idx="3"/>
+            <a:endCxn xmlns:a="http://schemas.openxmlformats.org/drawingml/2006/main" id="8" idx="1"/>
+          </p:cNvCxnSpPr>
+          <p:nvPr/>
+        </p:nvCxnSpPr>
+        <p:spPr>
+          <a:xfrm xmlns:a="http://schemas.openxmlformats.org/drawingml/2006/main">
+            <a:off x="2133600" y="2305050"/>
+            <a:ext cx="361950" cy="0"/>
+          </a:xfrm>
+          <a:prstGeom xmlns:a="http://schemas.openxmlformats.org/drawingml/2006/main" prst="straightConnector1">
+            <a:avLst/>
+          </a:prstGeom>
+          <a:ln xmlns:a="http://schemas.openxmlformats.org/drawingml/2006/main" w="19050">
+            <a:solidFill>
+              <a:srgbClr val="2F9BD3"/>
+            </a:solidFill>
+            <a:prstDash val="solid"/>
+            <a:tailEnd type="triangle" w="sm" len="sm"/>
+          </a:ln>
+        </p:spPr>
+      </p:cxnSp>
+      <p:cxnSp>
+        <p:nvCxnSpPr>
+          <p:cNvPr id="78" name=""/>
+          <p:cNvCxnSpPr>
+            <a:stCxn xmlns:a="http://schemas.openxmlformats.org/drawingml/2006/main" id="8" idx="3"/>
+            <a:endCxn xmlns:a="http://schemas.openxmlformats.org/drawingml/2006/main" id="12" idx="1"/>
+          </p:cNvCxnSpPr>
+          <p:nvPr/>
+        </p:nvCxnSpPr>
+        <p:spPr>
+          <a:xfrm xmlns:a="http://schemas.openxmlformats.org/drawingml/2006/main">
+            <a:off x="3924300" y="2305050"/>
+            <a:ext cx="361950" cy="0"/>
+          </a:xfrm>
+          <a:prstGeom xmlns:a="http://schemas.openxmlformats.org/drawingml/2006/main" prst="straightConnector1">
+            <a:avLst/>
+          </a:prstGeom>
+          <a:ln xmlns:a="http://schemas.openxmlformats.org/drawingml/2006/main" w="19050">
+            <a:solidFill>
+              <a:srgbClr val="2F9BD3"/>
+            </a:solidFill>
+            <a:prstDash val="solid"/>
+            <a:tailEnd type="triangle" w="sm" len="sm"/>
+          </a:ln>
+        </p:spPr>
+      </p:cxnSp>
+      <p:cxnSp>
+        <p:nvCxnSpPr>
+          <p:cNvPr id="79" name=""/>
+          <p:cNvCxnSpPr>
+            <a:stCxn xmlns:a="http://schemas.openxmlformats.org/drawingml/2006/main" id="12" idx="3"/>
+            <a:endCxn xmlns:a="http://schemas.openxmlformats.org/drawingml/2006/main" id="16" idx="1"/>
+          </p:cNvCxnSpPr>
+          <p:nvPr/>
+        </p:nvCxnSpPr>
+        <p:spPr>
+          <a:xfrm xmlns:a="http://schemas.openxmlformats.org/drawingml/2006/main">
+            <a:off x="5715000" y="2305050"/>
+            <a:ext cx="361950" cy="0"/>
+          </a:xfrm>
+          <a:prstGeom xmlns:a="http://schemas.openxmlformats.org/drawingml/2006/main" prst="straightConnector1">
+            <a:avLst/>
+          </a:prstGeom>
+          <a:ln xmlns:a="http://schemas.openxmlformats.org/drawingml/2006/main" w="19050">
+            <a:solidFill>
+              <a:srgbClr val="2F9BD3"/>
+            </a:solidFill>
+            <a:prstDash val="solid"/>
+            <a:tailEnd type="triangle" w="sm" len="sm"/>
+          </a:ln>
+        </p:spPr>
+      </p:cxnSp>
+      <p:cxnSp>
+        <p:nvCxnSpPr>
+          <p:cNvPr id="80" name=""/>
+          <p:cNvCxnSpPr>
+            <a:stCxn xmlns:a="http://schemas.openxmlformats.org/drawingml/2006/main" id="16" idx="3"/>
+            <a:endCxn xmlns:a="http://schemas.openxmlformats.org/drawingml/2006/main" id="20" idx="1"/>
+          </p:cNvCxnSpPr>
+          <p:nvPr/>
+        </p:nvCxnSpPr>
+        <p:spPr>
+          <a:xfrm xmlns:a="http://schemas.openxmlformats.org/drawingml/2006/main">
+            <a:off x="7505700" y="2305050"/>
+            <a:ext cx="361950" cy="0"/>
+          </a:xfrm>
+          <a:prstGeom xmlns:a="http://schemas.openxmlformats.org/drawingml/2006/main" prst="straightConnector1">
+            <a:avLst/>
+          </a:prstGeom>
+          <a:ln xmlns:a="http://schemas.openxmlformats.org/drawingml/2006/main" w="19050">
+            <a:solidFill>
+              <a:srgbClr val="2F9BD3"/>
+            </a:solidFill>
+            <a:prstDash val="solid"/>
+            <a:tailEnd type="triangle" w="sm" len="sm"/>
+          </a:ln>
+        </p:spPr>
+      </p:cxnSp>
+      <p:cxnSp>
+        <p:nvCxnSpPr>
+          <p:cNvPr id="81" name=""/>
+          <p:cNvCxnSpPr>
+            <a:stCxn xmlns:a="http://schemas.openxmlformats.org/drawingml/2006/main" id="20" idx="3"/>
+            <a:endCxn xmlns:a="http://schemas.openxmlformats.org/drawingml/2006/main" id="24" idx="1"/>
+          </p:cNvCxnSpPr>
+          <p:nvPr/>
+        </p:nvCxnSpPr>
+        <p:spPr>
+          <a:xfrm xmlns:a="http://schemas.openxmlformats.org/drawingml/2006/main">
+            <a:off x="9296400" y="2305050"/>
+            <a:ext cx="361950" cy="0"/>
+          </a:xfrm>
+          <a:prstGeom xmlns:a="http://schemas.openxmlformats.org/drawingml/2006/main" prst="straightConnector1">
+            <a:avLst/>
+          </a:prstGeom>
+          <a:ln xmlns:a="http://schemas.openxmlformats.org/drawingml/2006/main" w="19050">
+            <a:solidFill>
+              <a:srgbClr val="2F9BD3"/>
+            </a:solidFill>
+            <a:prstDash val="solid"/>
+            <a:tailEnd type="triangle" w="sm" len="sm"/>
+          </a:ln>
+        </p:spPr>
+      </p:cxnSp>
+      <p:cxnSp>
+        <p:nvCxnSpPr>
+          <p:cNvPr id="82" name=""/>
+          <p:cNvCxnSpPr>
+            <a:stCxn xmlns:a="http://schemas.openxmlformats.org/drawingml/2006/main" id="24" idx="2"/>
+            <a:endCxn xmlns:a="http://schemas.openxmlformats.org/drawingml/2006/main" id="4" idx="2"/>
+          </p:cNvCxnSpPr>
+          <p:nvPr/>
+        </p:nvCxnSpPr>
+        <p:spPr>
+          <a:xfrm xmlns:a="http://schemas.openxmlformats.org/drawingml/2006/main" flipH="1">
+            <a:off x="1419225" y="2800350"/>
+            <a:ext cx="8953500" cy="0"/>
+          </a:xfrm>
+          <a:prstGeom xmlns:a="http://schemas.openxmlformats.org/drawingml/2006/main" prst="curvedConnector2">
+            <a:avLst/>
+          </a:prstGeom>
+          <a:ln xmlns:a="http://schemas.openxmlformats.org/drawingml/2006/main" w="19050">
+            <a:solidFill>
+              <a:srgbClr val="2F9BD3"/>
+            </a:solidFill>
+            <a:prstDash val="solid"/>
+            <a:tailEnd type="triangle" w="sm" len="sm"/>
+          </a:ln>
+        </p:spPr>
+      </p:cxnSp>
+      <p:sp>
+        <p:nvSpPr>
+          <p:cNvPr id="34" name="">
+            <a:extLst xmlns:a="http://schemas.openxmlformats.org/drawingml/2006/main">
+              <a:ext uri="{FF2B5EF4-FFF2-40B4-BE49-F238E27FC236}">
+                <a16:creationId xmlns:a16="http://schemas.microsoft.com/office/drawing/2014/main" id="{413D4F13-9784-41C3-B510-96A55B0004AD}"/>
+              </a:ext>
+            </a:extLst>
+          </p:cNvPr>
+          <p:cNvSpPr>
+            <a:spLocks xmlns:a="http://schemas.openxmlformats.org/drawingml/2006/main" noGrp="1"/>
+          </p:cNvSpPr>
+          <p:nvPr/>
+        </p:nvSpPr>
+        <p:spPr>
+          <a:xfrm xmlns:a="http://schemas.openxmlformats.org/drawingml/2006/main">
+            <a:off x="819150" y="3019425"/>
+            <a:ext cx="1219200" cy="266700"/>
+          </a:xfrm>
+          <a:prstGeom xmlns:a="http://schemas.openxmlformats.org/drawingml/2006/main" prst="roundRect">
+            <a:avLst>
+              <a:gd name="adj" fmla="val 28571"/>
+            </a:avLst>
+          </a:prstGeom>
+          <a:solidFill xmlns:a="http://schemas.openxmlformats.org/drawingml/2006/main">
+            <a:srgbClr val="F59B4C"/>
+          </a:solidFill>
+          <a:ln xmlns:a="http://schemas.openxmlformats.org/drawingml/2006/main" w="0">
+            <a:noFill/>
+          </a:ln>
+        </p:spPr>
+      </p:sp>
+      <p:sp>
+        <p:nvSpPr>
+          <p:cNvPr id="35" name="">
+            <a:extLst xmlns:a="http://schemas.openxmlformats.org/drawingml/2006/main">
+              <a:ext uri="{FF2B5EF4-FFF2-40B4-BE49-F238E27FC236}">
+                <a16:creationId xmlns:a16="http://schemas.microsoft.com/office/drawing/2014/main" id="{E94763E8-1D19-4F79-B082-3775625BC56E}"/>
+              </a:ext>
+            </a:extLst>
+          </p:cNvPr>
+          <p:cNvSpPr>
+            <a:spLocks xmlns:a="http://schemas.openxmlformats.org/drawingml/2006/main" noGrp="1"/>
+          </p:cNvSpPr>
+          <p:nvPr/>
+        </p:nvSpPr>
+        <p:spPr>
+          <a:xfrm xmlns:a="http://schemas.openxmlformats.org/drawingml/2006/main">
+            <a:off x="819150" y="3057525"/>
+            <a:ext cx="1219200" cy="180975"/>
+          </a:xfrm>
+          <a:prstGeom xmlns:a="http://schemas.openxmlformats.org/drawingml/2006/main" prst="rect">
+            <a:avLst/>
+          </a:prstGeom>
+          <a:noFill xmlns:a="http://schemas.openxmlformats.org/drawingml/2006/main"/>
+          <a:ln xmlns:a="http://schemas.openxmlformats.org/drawingml/2006/main" w="0">
+            <a:noFill/>
+          </a:ln>
+        </p:spPr>
+        <p:txBody>
+          <a:bodyPr xmlns:a="http://schemas.openxmlformats.org/drawingml/2006/main" lIns="0" tIns="0" rIns="0" bIns="0" anchor="ctr">
+            <a:normAutofit fontScale="100000"/>
+          </a:bodyPr>
+          <a:lstStyle xmlns:a="http://schemas.openxmlformats.org/drawingml/2006/main"/>
+          <a:p xmlns:a="http://schemas.openxmlformats.org/drawingml/2006/main">
+            <a:pPr algn="ctr">
+              <a:defRPr sz="975" b="1">
+                <a:solidFill>
+                  <a:srgbClr val="FFFFFF"/>
+                </a:solidFill>
+                <a:latin typeface="Noto Sans TC"/>
+                <a:ea typeface="Noto Sans TC"/>
+                <a:cs typeface="Noto Sans TC"/>
+              </a:defRPr>
+            </a:pPr>
+            <a:r>
+              <a:rPr sz="975" b="1">
+                <a:solidFill>
+                  <a:srgbClr val="FFFFFF"/>
+                </a:solidFill>
+                <a:latin typeface="Noto Sans TC"/>
+                <a:ea typeface="Noto Sans TC"/>
+                <a:cs typeface="Noto Sans TC"/>
+              </a:rPr>
+              <a:t>低額、高頻</a:t>
+            </a:r>
+          </a:p>
+        </p:txBody>
+      </p:sp>
+      <p:sp>
+        <p:nvSpPr>
+          <p:cNvPr id="36" name="">
+            <a:extLst xmlns:a="http://schemas.openxmlformats.org/drawingml/2006/main">
+              <a:ext uri="{FF2B5EF4-FFF2-40B4-BE49-F238E27FC236}">
+                <a16:creationId xmlns:a16="http://schemas.microsoft.com/office/drawing/2014/main" id="{D94634D2-77FA-489B-BDDA-6232D5BC0E15}"/>
+              </a:ext>
+            </a:extLst>
+          </p:cNvPr>
+          <p:cNvSpPr>
+            <a:spLocks xmlns:a="http://schemas.openxmlformats.org/drawingml/2006/main" noGrp="1"/>
+          </p:cNvSpPr>
+          <p:nvPr/>
+        </p:nvSpPr>
+        <p:spPr>
+          <a:xfrm xmlns:a="http://schemas.openxmlformats.org/drawingml/2006/main">
+            <a:off x="5829300" y="3371850"/>
+            <a:ext cx="3733800" cy="1581150"/>
+          </a:xfrm>
+          <a:prstGeom xmlns:a="http://schemas.openxmlformats.org/drawingml/2006/main" prst="roundRect">
+            <a:avLst>
+              <a:gd name="adj" fmla="val 4819"/>
+            </a:avLst>
+          </a:prstGeom>
+          <a:solidFill xmlns:a="http://schemas.openxmlformats.org/drawingml/2006/main">
+            <a:srgbClr val="FFFFFF"/>
+          </a:solidFill>
+          <a:ln xmlns:a="http://schemas.openxmlformats.org/drawingml/2006/main" w="19050">
+            <a:solidFill>
+              <a:srgbClr val="F8C449"/>
+            </a:solidFill>
+            <a:prstDash val="solid"/>
+          </a:ln>
+        </p:spPr>
+      </p:sp>
+      <p:sp>
+        <p:nvSpPr>
+          <p:cNvPr id="37" name="">
+            <a:extLst xmlns:a="http://schemas.openxmlformats.org/drawingml/2006/main">
+              <a:ext uri="{FF2B5EF4-FFF2-40B4-BE49-F238E27FC236}">
+                <a16:creationId xmlns:a16="http://schemas.microsoft.com/office/drawing/2014/main" id="{B85A8CAC-CA36-4F72-87D1-A6A6AEBFEEB4}"/>
+              </a:ext>
+            </a:extLst>
+          </p:cNvPr>
+          <p:cNvSpPr>
+            <a:spLocks xmlns:a="http://schemas.openxmlformats.org/drawingml/2006/main" noGrp="1"/>
+          </p:cNvSpPr>
+          <p:nvPr/>
+        </p:nvSpPr>
+        <p:spPr>
+          <a:xfrm xmlns:a="http://schemas.openxmlformats.org/drawingml/2006/main">
+            <a:off x="6019800" y="3543300"/>
+            <a:ext cx="3352800" cy="266700"/>
+          </a:xfrm>
+          <a:prstGeom xmlns:a="http://schemas.openxmlformats.org/drawingml/2006/main" prst="rect">
+            <a:avLst/>
+          </a:prstGeom>
+          <a:noFill xmlns:a="http://schemas.openxmlformats.org/drawingml/2006/main"/>
+          <a:ln xmlns:a="http://schemas.openxmlformats.org/drawingml/2006/main" w="0">
+            <a:noFill/>
+          </a:ln>
+        </p:spPr>
+        <p:txBody>
+          <a:bodyPr xmlns:a="http://schemas.openxmlformats.org/drawingml/2006/main" lIns="0" tIns="0" rIns="0" bIns="0" anchor="ctr">
+            <a:normAutofit fontScale="100000"/>
+          </a:bodyPr>
+          <a:lstStyle xmlns:a="http://schemas.openxmlformats.org/drawingml/2006/main"/>
+          <a:p xmlns:a="http://schemas.openxmlformats.org/drawingml/2006/main">
+            <a:pPr algn="ctr">
+              <a:defRPr sz="1275" b="1">
+                <a:solidFill>
+                  <a:srgbClr val="17344D"/>
+                </a:solidFill>
+                <a:latin typeface="Noto Sans TC"/>
+                <a:ea typeface="Noto Sans TC"/>
+                <a:cs typeface="Noto Sans TC"/>
+              </a:defRPr>
+            </a:pPr>
+            <a:r>
+              <a:rPr sz="1275" b="1">
+                <a:solidFill>
+                  <a:srgbClr val="17344D"/>
+                </a:solidFill>
+                <a:latin typeface="Noto Sans TC"/>
+                <a:ea typeface="Noto Sans TC"/>
+                <a:cs typeface="Noto Sans TC"/>
+              </a:rPr>
+              <a:t>金幣加速｜消耗金幣補足進度</a:t>
+            </a:r>
+          </a:p>
+        </p:txBody>
+      </p:sp>
+      <p:sp>
+        <p:nvSpPr>
+          <p:cNvPr id="38" name="">
+            <a:extLst xmlns:a="http://schemas.openxmlformats.org/drawingml/2006/main">
+              <a:ext uri="{FF2B5EF4-FFF2-40B4-BE49-F238E27FC236}">
+                <a16:creationId xmlns:a16="http://schemas.microsoft.com/office/drawing/2014/main" id="{A2ECC1E9-E8C9-4077-9754-C1E2745FF641}"/>
+              </a:ext>
+            </a:extLst>
+          </p:cNvPr>
+          <p:cNvSpPr>
+            <a:spLocks xmlns:a="http://schemas.openxmlformats.org/drawingml/2006/main" noGrp="1"/>
+          </p:cNvSpPr>
+          <p:nvPr/>
+        </p:nvSpPr>
+        <p:spPr>
+          <a:xfrm xmlns:a="http://schemas.openxmlformats.org/drawingml/2006/main">
+            <a:off x="6019800" y="3905250"/>
+            <a:ext cx="3352800" cy="457200"/>
+          </a:xfrm>
+          <a:prstGeom xmlns:a="http://schemas.openxmlformats.org/drawingml/2006/main" prst="rect">
+            <a:avLst/>
+          </a:prstGeom>
+          <a:noFill xmlns:a="http://schemas.openxmlformats.org/drawingml/2006/main"/>
+          <a:ln xmlns:a="http://schemas.openxmlformats.org/drawingml/2006/main" w="0">
+            <a:noFill/>
+          </a:ln>
+        </p:spPr>
+        <p:txBody>
+          <a:bodyPr xmlns:a="http://schemas.openxmlformats.org/drawingml/2006/main" lIns="0" tIns="0" rIns="0" bIns="0" anchor="ctr">
+            <a:normAutofit fontScale="100000"/>
+          </a:bodyPr>
+          <a:lstStyle xmlns:a="http://schemas.openxmlformats.org/drawingml/2006/main"/>
+          <a:p xmlns:a="http://schemas.openxmlformats.org/drawingml/2006/main">
+            <a:pPr algn="ctr">
+              <a:defRPr sz="1200" b="1">
+                <a:solidFill>
+                  <a:srgbClr val="2F9BD3"/>
+                </a:solidFill>
+                <a:latin typeface="Noto Sans TC"/>
+                <a:ea typeface="Noto Sans TC"/>
+                <a:cs typeface="Noto Sans TC"/>
+              </a:defRPr>
+            </a:pPr>
+            <a:r>
+              <a:rPr sz="1200" b="1">
+                <a:solidFill>
+                  <a:srgbClr val="2F9BD3"/>
+                </a:solidFill>
+                <a:latin typeface="Noto Sans TC"/>
+                <a:ea typeface="Noto Sans TC"/>
+                <a:cs typeface="Noto Sans TC"/>
+              </a:rPr>
+              <a:t>0%＝160,000　／　50%＝80,000</a:t>
+            </a:r>
+          </a:p>
+          <a:p xmlns:a="http://schemas.openxmlformats.org/drawingml/2006/main">
+            <a:pPr algn="ctr">
+              <a:defRPr sz="1200" b="1">
+                <a:solidFill>
+                  <a:srgbClr val="2F9BD3"/>
+                </a:solidFill>
+                <a:latin typeface="Noto Sans TC"/>
+                <a:ea typeface="Noto Sans TC"/>
+                <a:cs typeface="Noto Sans TC"/>
+              </a:defRPr>
+            </a:pPr>
+            <a:r>
+              <a:rPr sz="1200" b="1">
+                <a:solidFill>
+                  <a:srgbClr val="2F9BD3"/>
+                </a:solidFill>
+                <a:latin typeface="Noto Sans TC"/>
+                <a:ea typeface="Noto Sans TC"/>
+                <a:cs typeface="Noto Sans TC"/>
+              </a:rPr>
+              <a:t>90%＝16,000　／　100%＝免費</a:t>
+            </a:r>
+          </a:p>
+        </p:txBody>
+      </p:sp>
+      <p:sp>
+        <p:nvSpPr>
+          <p:cNvPr id="39" name="">
+            <a:extLst xmlns:a="http://schemas.openxmlformats.org/drawingml/2006/main">
+              <a:ext uri="{FF2B5EF4-FFF2-40B4-BE49-F238E27FC236}">
+                <a16:creationId xmlns:a16="http://schemas.microsoft.com/office/drawing/2014/main" id="{1E6BB02D-84F4-481C-B99D-2221B5A6411E}"/>
+              </a:ext>
+            </a:extLst>
+          </p:cNvPr>
+          <p:cNvSpPr>
+            <a:spLocks xmlns:a="http://schemas.openxmlformats.org/drawingml/2006/main" noGrp="1"/>
+          </p:cNvSpPr>
+          <p:nvPr/>
+        </p:nvSpPr>
+        <p:spPr>
+          <a:xfrm xmlns:a="http://schemas.openxmlformats.org/drawingml/2006/main">
+            <a:off x="6858000" y="4505325"/>
+            <a:ext cx="1676400" cy="266700"/>
+          </a:xfrm>
+          <a:prstGeom xmlns:a="http://schemas.openxmlformats.org/drawingml/2006/main" prst="roundRect">
+            <a:avLst>
+              <a:gd name="adj" fmla="val 28571"/>
+            </a:avLst>
+          </a:prstGeom>
+          <a:solidFill xmlns:a="http://schemas.openxmlformats.org/drawingml/2006/main">
+            <a:srgbClr val="17344D"/>
+          </a:solidFill>
+          <a:ln xmlns:a="http://schemas.openxmlformats.org/drawingml/2006/main" w="0">
+            <a:noFill/>
+          </a:ln>
+        </p:spPr>
+      </p:sp>
+      <p:sp>
+        <p:nvSpPr>
+          <p:cNvPr id="40" name="">
+            <a:extLst xmlns:a="http://schemas.openxmlformats.org/drawingml/2006/main">
+              <a:ext uri="{FF2B5EF4-FFF2-40B4-BE49-F238E27FC236}">
+                <a16:creationId xmlns:a16="http://schemas.microsoft.com/office/drawing/2014/main" id="{5AE89E3E-5684-41BE-A56E-A35E971A3DBE}"/>
+              </a:ext>
+            </a:extLst>
+          </p:cNvPr>
+          <p:cNvSpPr>
+            <a:spLocks xmlns:a="http://schemas.openxmlformats.org/drawingml/2006/main" noGrp="1"/>
+          </p:cNvSpPr>
+          <p:nvPr/>
+        </p:nvSpPr>
+        <p:spPr>
+          <a:xfrm xmlns:a="http://schemas.openxmlformats.org/drawingml/2006/main">
+            <a:off x="6858000" y="4543425"/>
+            <a:ext cx="1676400" cy="180975"/>
+          </a:xfrm>
+          <a:prstGeom xmlns:a="http://schemas.openxmlformats.org/drawingml/2006/main" prst="rect">
+            <a:avLst/>
+          </a:prstGeom>
+          <a:noFill xmlns:a="http://schemas.openxmlformats.org/drawingml/2006/main"/>
+          <a:ln xmlns:a="http://schemas.openxmlformats.org/drawingml/2006/main" w="0">
+            <a:noFill/>
+          </a:ln>
+        </p:spPr>
+        <p:txBody>
+          <a:bodyPr xmlns:a="http://schemas.openxmlformats.org/drawingml/2006/main" lIns="0" tIns="0" rIns="0" bIns="0" anchor="ctr">
+            <a:normAutofit fontScale="100000"/>
+          </a:bodyPr>
+          <a:lstStyle xmlns:a="http://schemas.openxmlformats.org/drawingml/2006/main"/>
+          <a:p xmlns:a="http://schemas.openxmlformats.org/drawingml/2006/main">
+            <a:pPr algn="ctr">
+              <a:defRPr sz="975" b="1">
+                <a:solidFill>
+                  <a:srgbClr val="FFFFFF"/>
+                </a:solidFill>
+                <a:latin typeface="Noto Sans TC"/>
+                <a:ea typeface="Noto Sans TC"/>
+                <a:cs typeface="Noto Sans TC"/>
+              </a:defRPr>
+            </a:pPr>
+            <a:r>
+              <a:rPr sz="975" b="1">
+                <a:solidFill>
+                  <a:srgbClr val="FFFFFF"/>
+                </a:solidFill>
+                <a:latin typeface="Noto Sans TC"/>
+                <a:ea typeface="Noto Sans TC"/>
+                <a:cs typeface="Noto Sans TC"/>
+              </a:rPr>
+              <a:t>高額、低頻</a:t>
+            </a:r>
+          </a:p>
+        </p:txBody>
+      </p:sp>
+      <p:cxnSp>
+        <p:nvCxnSpPr>
+          <p:cNvPr id="90" name=""/>
+          <p:cNvCxnSpPr>
+            <a:stCxn xmlns:a="http://schemas.openxmlformats.org/drawingml/2006/main" id="16" idx="2"/>
+            <a:endCxn xmlns:a="http://schemas.openxmlformats.org/drawingml/2006/main" id="36" idx="0"/>
+          </p:cNvCxnSpPr>
+          <p:nvPr/>
+        </p:nvCxnSpPr>
+        <p:spPr>
+          <a:xfrm xmlns:a="http://schemas.openxmlformats.org/drawingml/2006/main">
+            <a:off x="6791325" y="2800350"/>
+            <a:ext cx="904875" cy="571500"/>
+          </a:xfrm>
+          <a:prstGeom xmlns:a="http://schemas.openxmlformats.org/drawingml/2006/main" prst="straightConnector1">
+            <a:avLst/>
+          </a:prstGeom>
+          <a:ln xmlns:a="http://schemas.openxmlformats.org/drawingml/2006/main" w="19050">
+            <a:solidFill>
+              <a:srgbClr val="F59B4C"/>
+            </a:solidFill>
+            <a:prstDash val="solid"/>
+            <a:tailEnd type="triangle" w="sm" len="sm"/>
+          </a:ln>
+        </p:spPr>
+      </p:cxnSp>
+      <p:sp>
+        <p:nvSpPr>
+          <p:cNvPr id="42" name="">
+            <a:extLst xmlns:a="http://schemas.openxmlformats.org/drawingml/2006/main">
+              <a:ext uri="{FF2B5EF4-FFF2-40B4-BE49-F238E27FC236}">
+                <a16:creationId xmlns:a16="http://schemas.microsoft.com/office/drawing/2014/main" id="{C2BF9439-8909-43C2-B695-72AE669B3FC5}"/>
+              </a:ext>
+            </a:extLst>
+          </p:cNvPr>
+          <p:cNvSpPr>
+            <a:spLocks xmlns:a="http://schemas.openxmlformats.org/drawingml/2006/main" noGrp="1"/>
+          </p:cNvSpPr>
+          <p:nvPr/>
+        </p:nvSpPr>
+        <p:spPr>
+          <a:xfrm xmlns:a="http://schemas.openxmlformats.org/drawingml/2006/main">
+            <a:off x="781050" y="3790950"/>
+            <a:ext cx="4400550" cy="1162050"/>
+          </a:xfrm>
+          <a:prstGeom xmlns:a="http://schemas.openxmlformats.org/drawingml/2006/main" prst="roundRect">
+            <a:avLst>
+              <a:gd name="adj" fmla="val 6557"/>
+            </a:avLst>
+          </a:prstGeom>
+          <a:solidFill xmlns:a="http://schemas.openxmlformats.org/drawingml/2006/main">
+            <a:srgbClr val="F0FBFB"/>
+          </a:solidFill>
+          <a:ln xmlns:a="http://schemas.openxmlformats.org/drawingml/2006/main" w="9525">
+            <a:solidFill>
+              <a:srgbClr val="D7E5E8"/>
+            </a:solidFill>
+            <a:prstDash val="solid"/>
+          </a:ln>
+        </p:spPr>
+      </p:sp>
+      <p:sp>
+        <p:nvSpPr>
+          <p:cNvPr id="43" name="">
+            <a:extLst xmlns:a="http://schemas.openxmlformats.org/drawingml/2006/main">
+              <a:ext uri="{FF2B5EF4-FFF2-40B4-BE49-F238E27FC236}">
+                <a16:creationId xmlns:a16="http://schemas.microsoft.com/office/drawing/2014/main" id="{8E33F048-E2B3-49F3-AE08-DD385407D7D5}"/>
+              </a:ext>
+            </a:extLst>
+          </p:cNvPr>
+          <p:cNvSpPr>
+            <a:spLocks xmlns:a="http://schemas.openxmlformats.org/drawingml/2006/main" noGrp="1"/>
+          </p:cNvSpPr>
+          <p:nvPr/>
+        </p:nvSpPr>
+        <p:spPr>
+          <a:xfrm xmlns:a="http://schemas.openxmlformats.org/drawingml/2006/main">
+            <a:off x="990600" y="3943350"/>
+            <a:ext cx="3981450" cy="266700"/>
+          </a:xfrm>
+          <a:prstGeom xmlns:a="http://schemas.openxmlformats.org/drawingml/2006/main" prst="rect">
+            <a:avLst/>
+          </a:prstGeom>
+          <a:noFill xmlns:a="http://schemas.openxmlformats.org/drawingml/2006/main"/>
+          <a:ln xmlns:a="http://schemas.openxmlformats.org/drawingml/2006/main" w="0">
+            <a:noFill/>
+          </a:ln>
+        </p:spPr>
+        <p:txBody>
+          <a:bodyPr xmlns:a="http://schemas.openxmlformats.org/drawingml/2006/main" lIns="0" tIns="0" rIns="0" bIns="0" anchor="ctr">
+            <a:normAutofit fontScale="100000"/>
+          </a:bodyPr>
+          <a:lstStyle xmlns:a="http://schemas.openxmlformats.org/drawingml/2006/main"/>
+          <a:p xmlns:a="http://schemas.openxmlformats.org/drawingml/2006/main">
+            <a:pPr algn="ctr">
+              <a:defRPr sz="1350" b="1">
+                <a:solidFill>
+                  <a:srgbClr val="17344D"/>
+                </a:solidFill>
+                <a:latin typeface="Noto Sans TC"/>
+                <a:ea typeface="Noto Sans TC"/>
+                <a:cs typeface="Noto Sans TC"/>
+              </a:defRPr>
+            </a:pPr>
+            <a:r>
+              <a:rPr sz="1350" b="1">
+                <a:solidFill>
+                  <a:srgbClr val="17344D"/>
+                </a:solidFill>
+                <a:latin typeface="Noto Sans TC"/>
+                <a:ea typeface="Noto Sans TC"/>
+                <a:cs typeface="Noto Sans TC"/>
+              </a:rPr>
+              <a:t>有限轉蛋池｜完整收藏目標</a:t>
+            </a:r>
+          </a:p>
+        </p:txBody>
+      </p:sp>
+      <p:sp>
+        <p:nvSpPr>
+          <p:cNvPr id="44" name="">
+            <a:extLst xmlns:a="http://schemas.openxmlformats.org/drawingml/2006/main">
+              <a:ext uri="{FF2B5EF4-FFF2-40B4-BE49-F238E27FC236}">
+                <a16:creationId xmlns:a16="http://schemas.microsoft.com/office/drawing/2014/main" id="{77675210-72D1-4471-B7DD-765FE2046217}"/>
+              </a:ext>
+            </a:extLst>
+          </p:cNvPr>
+          <p:cNvSpPr>
+            <a:spLocks xmlns:a="http://schemas.openxmlformats.org/drawingml/2006/main" noGrp="1"/>
+          </p:cNvSpPr>
+          <p:nvPr/>
+        </p:nvSpPr>
+        <p:spPr>
+          <a:xfrm xmlns:a="http://schemas.openxmlformats.org/drawingml/2006/main">
+            <a:off x="1028700" y="4314825"/>
+            <a:ext cx="3905250" cy="419100"/>
+          </a:xfrm>
+          <a:prstGeom xmlns:a="http://schemas.openxmlformats.org/drawingml/2006/main" prst="rect">
+            <a:avLst/>
+          </a:prstGeom>
+          <a:noFill xmlns:a="http://schemas.openxmlformats.org/drawingml/2006/main"/>
+          <a:ln xmlns:a="http://schemas.openxmlformats.org/drawingml/2006/main" w="0">
+            <a:noFill/>
+          </a:ln>
+        </p:spPr>
+        <p:txBody>
+          <a:bodyPr xmlns:a="http://schemas.openxmlformats.org/drawingml/2006/main" lIns="0" tIns="0" rIns="0" bIns="0" anchor="ctr">
+            <a:normAutofit fontScale="100000"/>
+          </a:bodyPr>
+          <a:lstStyle xmlns:a="http://schemas.openxmlformats.org/drawingml/2006/main"/>
+          <a:p xmlns:a="http://schemas.openxmlformats.org/drawingml/2006/main">
+            <a:pPr algn="ctr">
+              <a:defRPr sz="1050" b="0">
+                <a:solidFill>
+                  <a:srgbClr val="657784"/>
+                </a:solidFill>
+                <a:latin typeface="Noto Sans TC"/>
+                <a:ea typeface="Noto Sans TC"/>
+                <a:cs typeface="Noto Sans TC"/>
+              </a:defRPr>
+            </a:pPr>
+            <a:r>
+              <a:rPr sz="1050" b="0">
+                <a:solidFill>
+                  <a:srgbClr val="657784"/>
+                </a:solidFill>
+                <a:latin typeface="Noto Sans TC"/>
+                <a:ea typeface="Noto Sans TC"/>
+                <a:cs typeface="Noto Sans TC"/>
+              </a:rPr>
+              <a:t>抽到即從獎池移除，最終可抽完整池；</a:t>
+            </a:r>
+          </a:p>
+          <a:p xmlns:a="http://schemas.openxmlformats.org/drawingml/2006/main">
+            <a:pPr algn="ctr">
+              <a:defRPr sz="1050" b="0">
+                <a:solidFill>
+                  <a:srgbClr val="657784"/>
+                </a:solidFill>
+                <a:latin typeface="Noto Sans TC"/>
+                <a:ea typeface="Noto Sans TC"/>
+                <a:cs typeface="Noto Sans TC"/>
+              </a:defRPr>
+            </a:pPr>
+            <a:r>
+              <a:rPr sz="1050" b="0">
+                <a:solidFill>
+                  <a:srgbClr val="657784"/>
+                </a:solidFill>
+                <a:latin typeface="Noto Sans TC"/>
+                <a:ea typeface="Noto Sans TC"/>
+                <a:cs typeface="Noto Sans TC"/>
+              </a:rPr>
+              <a:t>取得的收藏可帶回多人對局展示。</a:t>
+            </a:r>
+          </a:p>
+        </p:txBody>
+      </p:sp>
+      <p:sp>
+        <p:nvSpPr>
+          <p:cNvPr id="45" name="">
+            <a:extLst xmlns:a="http://schemas.openxmlformats.org/drawingml/2006/main">
+              <a:ext uri="{FF2B5EF4-FFF2-40B4-BE49-F238E27FC236}">
+                <a16:creationId xmlns:a16="http://schemas.microsoft.com/office/drawing/2014/main" id="{3E202350-0AAB-4971-BD0E-A6AF62AA00ED}"/>
+              </a:ext>
+            </a:extLst>
+          </p:cNvPr>
+          <p:cNvSpPr>
+            <a:spLocks xmlns:a="http://schemas.openxmlformats.org/drawingml/2006/main" noGrp="1"/>
+          </p:cNvSpPr>
+          <p:nvPr/>
+        </p:nvSpPr>
+        <p:spPr>
+          <a:xfrm xmlns:a="http://schemas.openxmlformats.org/drawingml/2006/main">
+            <a:off x="723900" y="5410200"/>
+            <a:ext cx="10706100" cy="552450"/>
+          </a:xfrm>
+          <a:prstGeom xmlns:a="http://schemas.openxmlformats.org/drawingml/2006/main" prst="roundRect">
+            <a:avLst>
+              <a:gd name="adj" fmla="val 27586"/>
+            </a:avLst>
+          </a:prstGeom>
+          <a:solidFill xmlns:a="http://schemas.openxmlformats.org/drawingml/2006/main">
+            <a:srgbClr val="FFF4D6"/>
+          </a:solidFill>
+          <a:ln xmlns:a="http://schemas.openxmlformats.org/drawingml/2006/main" w="0">
+            <a:noFill/>
+          </a:ln>
+        </p:spPr>
+      </p:sp>
+      <p:sp>
+        <p:nvSpPr>
+          <p:cNvPr id="46" name="">
+            <a:extLst xmlns:a="http://schemas.openxmlformats.org/drawingml/2006/main">
+              <a:ext uri="{FF2B5EF4-FFF2-40B4-BE49-F238E27FC236}">
+                <a16:creationId xmlns:a16="http://schemas.microsoft.com/office/drawing/2014/main" id="{FB909498-B6FB-4F04-B6D7-02D59048A217}"/>
+              </a:ext>
+            </a:extLst>
+          </p:cNvPr>
+          <p:cNvSpPr>
+            <a:spLocks xmlns:a="http://schemas.openxmlformats.org/drawingml/2006/main" noGrp="1"/>
+          </p:cNvSpPr>
+          <p:nvPr/>
+        </p:nvSpPr>
+        <p:spPr>
+          <a:xfrm xmlns:a="http://schemas.openxmlformats.org/drawingml/2006/main">
+            <a:off x="933450" y="5534025"/>
+            <a:ext cx="10287000" cy="285750"/>
+          </a:xfrm>
+          <a:prstGeom xmlns:a="http://schemas.openxmlformats.org/drawingml/2006/main" prst="rect">
+            <a:avLst/>
+          </a:prstGeom>
+          <a:noFill xmlns:a="http://schemas.openxmlformats.org/drawingml/2006/main"/>
+          <a:ln xmlns:a="http://schemas.openxmlformats.org/drawingml/2006/main" w="0">
+            <a:noFill/>
+          </a:ln>
+        </p:spPr>
+        <p:txBody>
+          <a:bodyPr xmlns:a="http://schemas.openxmlformats.org/drawingml/2006/main" lIns="0" tIns="0" rIns="0" bIns="0" anchor="ctr">
+            <a:normAutofit fontScale="100000"/>
+          </a:bodyPr>
+          <a:lstStyle xmlns:a="http://schemas.openxmlformats.org/drawingml/2006/main"/>
+          <a:p xmlns:a="http://schemas.openxmlformats.org/drawingml/2006/main">
+            <a:pPr algn="ctr">
+              <a:defRPr sz="1725" b="1">
+                <a:solidFill>
+                  <a:srgbClr val="17344D"/>
+                </a:solidFill>
+                <a:latin typeface="Noto Sans TC"/>
+                <a:ea typeface="Noto Sans TC"/>
+                <a:cs typeface="Noto Sans TC"/>
+              </a:defRPr>
+            </a:pPr>
+            <a:r>
+              <a:rPr sz="1725" b="1">
+                <a:solidFill>
+                  <a:srgbClr val="17344D"/>
+                </a:solidFill>
+                <a:latin typeface="Noto Sans TC"/>
+                <a:ea typeface="Noto Sans TC"/>
+                <a:cs typeface="Noto Sans TC"/>
+              </a:rPr>
+              <a:t>遊玩累積進度  ×  金幣加速收藏</a:t>
+            </a:r>
+          </a:p>
+        </p:txBody>
+      </p:sp>
+      <p:sp>
+        <p:nvSpPr>
+          <p:cNvPr id="47" name="">
+            <a:extLst xmlns:a="http://schemas.openxmlformats.org/drawingml/2006/main">
+              <a:ext uri="{FF2B5EF4-FFF2-40B4-BE49-F238E27FC236}">
+                <a16:creationId xmlns:a16="http://schemas.microsoft.com/office/drawing/2014/main" id="{38AB4227-B041-4257-94B2-D50B9E0DB536}"/>
+              </a:ext>
+            </a:extLst>
+          </p:cNvPr>
+          <p:cNvSpPr>
+            <a:spLocks xmlns:a="http://schemas.openxmlformats.org/drawingml/2006/main" noGrp="1"/>
+          </p:cNvSpPr>
+          <p:nvPr/>
+        </p:nvSpPr>
+        <p:spPr>
+          <a:xfrm xmlns:a="http://schemas.openxmlformats.org/drawingml/2006/main">
+            <a:off x="723900" y="6362700"/>
+            <a:ext cx="10744200" cy="0"/>
+          </a:xfrm>
+          <a:prstGeom xmlns:a="http://schemas.openxmlformats.org/drawingml/2006/main" prst="line">
+            <a:avLst/>
+          </a:prstGeom>
+          <a:noFill xmlns:a="http://schemas.openxmlformats.org/drawingml/2006/main"/>
+          <a:ln xmlns:a="http://schemas.openxmlformats.org/drawingml/2006/main" w="9525">
+            <a:solidFill>
+              <a:srgbClr val="D7E5E8"/>
+            </a:solidFill>
+            <a:prstDash val="solid"/>
+          </a:ln>
+        </p:spPr>
+      </p:sp>
+      <p:sp>
+        <p:nvSpPr>
+          <p:cNvPr id="48" name="">
+            <a:extLst xmlns:a="http://schemas.openxmlformats.org/drawingml/2006/main">
+              <a:ext uri="{FF2B5EF4-FFF2-40B4-BE49-F238E27FC236}">
+                <a16:creationId xmlns:a16="http://schemas.microsoft.com/office/drawing/2014/main" id="{B36E30FA-C177-49AA-B7E5-8FD71506A8A0}"/>
+              </a:ext>
+            </a:extLst>
+          </p:cNvPr>
+          <p:cNvSpPr>
+            <a:spLocks xmlns:a="http://schemas.openxmlformats.org/drawingml/2006/main" noGrp="1"/>
+          </p:cNvSpPr>
+          <p:nvPr/>
+        </p:nvSpPr>
+        <p:spPr>
+          <a:xfrm xmlns:a="http://schemas.openxmlformats.org/drawingml/2006/main">
+            <a:off x="723900" y="6467475"/>
+            <a:ext cx="4762500" cy="171450"/>
+          </a:xfrm>
+          <a:prstGeom xmlns:a="http://schemas.openxmlformats.org/drawingml/2006/main" prst="rect">
+            <a:avLst/>
+          </a:prstGeom>
+          <a:noFill xmlns:a="http://schemas.openxmlformats.org/drawingml/2006/main"/>
+          <a:ln xmlns:a="http://schemas.openxmlformats.org/drawingml/2006/main" w="0">
+            <a:noFill/>
+          </a:ln>
+        </p:spPr>
+        <p:txBody>
+          <a:bodyPr xmlns:a="http://schemas.openxmlformats.org/drawingml/2006/main" lIns="0" tIns="0" rIns="0" bIns="0" anchor="ctr">
+            <a:normAutofit fontScale="100000"/>
+          </a:bodyPr>
+          <a:lstStyle xmlns:a="http://schemas.openxmlformats.org/drawingml/2006/main"/>
+          <a:p xmlns:a="http://schemas.openxmlformats.org/drawingml/2006/main">
+            <a:pPr algn="l">
+              <a:defRPr sz="825" b="0">
+                <a:solidFill>
+                  <a:srgbClr val="657784"/>
+                </a:solidFill>
+                <a:latin typeface="Noto Sans TC"/>
+                <a:ea typeface="Noto Sans TC"/>
+                <a:cs typeface="Noto Sans TC"/>
+              </a:defRPr>
+            </a:pPr>
+            <a:r>
+              <a:rPr sz="825" b="0">
+                <a:solidFill>
+                  <a:srgbClr val="657784"/>
+                </a:solidFill>
+                <a:latin typeface="Noto Sans TC"/>
+                <a:ea typeface="Noto Sans TC"/>
+                <a:cs typeface="Noto Sans TC"/>
+              </a:rPr>
+              <a:t>Traffic Bird｜多人派對玩法提案</a:t>
+            </a:r>
+          </a:p>
+        </p:txBody>
+      </p:sp>
+      <p:sp>
+        <p:nvSpPr>
+          <p:cNvPr id="49" name="">
+            <a:extLst xmlns:a="http://schemas.openxmlformats.org/drawingml/2006/main">
+              <a:ext uri="{FF2B5EF4-FFF2-40B4-BE49-F238E27FC236}">
+                <a16:creationId xmlns:a16="http://schemas.microsoft.com/office/drawing/2014/main" id="{4B7D514F-9396-4919-BBF1-9206CF6854A8}"/>
+              </a:ext>
+            </a:extLst>
+          </p:cNvPr>
+          <p:cNvSpPr>
+            <a:spLocks xmlns:a="http://schemas.openxmlformats.org/drawingml/2006/main" noGrp="1"/>
+          </p:cNvSpPr>
+          <p:nvPr/>
+        </p:nvSpPr>
+        <p:spPr>
+          <a:xfrm xmlns:a="http://schemas.openxmlformats.org/drawingml/2006/main">
+            <a:off x="10953750" y="6467475"/>
+            <a:ext cx="514350" cy="171450"/>
+          </a:xfrm>
+          <a:prstGeom xmlns:a="http://schemas.openxmlformats.org/drawingml/2006/main" prst="rect">
+            <a:avLst/>
+          </a:prstGeom>
+          <a:noFill xmlns:a="http://schemas.openxmlformats.org/drawingml/2006/main"/>
+          <a:ln xmlns:a="http://schemas.openxmlformats.org/drawingml/2006/main" w="0">
+            <a:noFill/>
+          </a:ln>
+        </p:spPr>
+        <p:txBody>
+          <a:bodyPr xmlns:a="http://schemas.openxmlformats.org/drawingml/2006/main" lIns="0" tIns="0" rIns="0" bIns="0" anchor="ctr">
+            <a:normAutofit fontScale="100000"/>
+          </a:bodyPr>
+          <a:lstStyle xmlns:a="http://schemas.openxmlformats.org/drawingml/2006/main"/>
+          <a:p xmlns:a="http://schemas.openxmlformats.org/drawingml/2006/main">
             <a:pPr algn="r">
               <a:defRPr sz="825" b="0">
                 <a:solidFill>
@@ -11921,6 +14117,416 @@
                 <a:cs typeface="Noto Sans TC"/>
               </a:rPr>
               <a:t>8</a:t>
+            </a:r>
+          </a:p>
+        </p:txBody>
+      </p:sp>
+    </p:spTree>
+    <p:extLst>
+      <p:ext uri="{BB962C8B-B14F-4D97-AF65-F5344CB8AC3E}">
+        <p14:creationId xmlns:p14="http://schemas.microsoft.com/office/powerpoint/2010/main" val="1651809018"/>
+      </p:ext>
+    </p:extLst>
+  </p:cSld>
+</p:sld>
+</file>
+
+<file path=ppt/slides/slide9.xml><?xml version="1.0" encoding="utf-8"?>
+<p:sld xmlns:p="http://schemas.openxmlformats.org/presentationml/2006/main">
+  <p:cSld>
+    <p:bg>
+      <p:bgPr>
+        <a:solidFill xmlns:a="http://schemas.openxmlformats.org/drawingml/2006/main">
+          <a:srgbClr val="FBFAF6"/>
+        </a:solidFill>
+      </p:bgPr>
+    </p:bg>
+    <p:spTree>
+      <p:nvGrpSpPr>
+        <p:cNvPr id="1" name=""/>
+        <p:cNvGrpSpPr/>
+        <p:nvPr/>
+      </p:nvGrpSpPr>
+      <p:grpSpPr>
+        <a:xfrm xmlns:a="http://schemas.openxmlformats.org/drawingml/2006/main"/>
+      </p:grpSpPr>
+      <p:sp>
+        <p:nvSpPr>
+          <p:cNvPr id="9" name="">
+            <a:extLst xmlns:a="http://schemas.openxmlformats.org/drawingml/2006/main">
+              <a:ext uri="{FF2B5EF4-FFF2-40B4-BE49-F238E27FC236}">
+                <a16:creationId xmlns:a16="http://schemas.microsoft.com/office/drawing/2014/main" id="{14CAFE0F-4EA4-4A37-B59A-9B8675D479DB}"/>
+              </a:ext>
+            </a:extLst>
+          </p:cNvPr>
+          <p:cNvSpPr>
+            <a:spLocks xmlns:a="http://schemas.openxmlformats.org/drawingml/2006/main" noGrp="1"/>
+          </p:cNvSpPr>
+          <p:nvPr/>
+        </p:nvSpPr>
+        <p:spPr>
+          <a:xfrm xmlns:a="http://schemas.openxmlformats.org/drawingml/2006/main">
+            <a:off x="7848600" y="1447800"/>
+            <a:ext cx="2571750" cy="2571750"/>
+          </a:xfrm>
+          <a:prstGeom xmlns:a="http://schemas.openxmlformats.org/drawingml/2006/main" prst="ellipse">
+            <a:avLst/>
+          </a:prstGeom>
+          <a:solidFill xmlns:a="http://schemas.openxmlformats.org/drawingml/2006/main">
+            <a:srgbClr val="DDF5F6"/>
+          </a:solidFill>
+          <a:ln xmlns:a="http://schemas.openxmlformats.org/drawingml/2006/main" w="0">
+            <a:noFill/>
+          </a:ln>
+        </p:spPr>
+      </p:sp>
+      <p:sp>
+        <p:nvSpPr>
+          <p:cNvPr id="2" name="">
+            <a:extLst xmlns:a="http://schemas.openxmlformats.org/drawingml/2006/main">
+              <a:ext uri="{FF2B5EF4-FFF2-40B4-BE49-F238E27FC236}">
+                <a16:creationId xmlns:a16="http://schemas.microsoft.com/office/drawing/2014/main" id="{AABB1D5D-AB6A-4661-BA6D-3C3F49DF0F05}"/>
+              </a:ext>
+            </a:extLst>
+          </p:cNvPr>
+          <p:cNvSpPr>
+            <a:spLocks xmlns:a="http://schemas.openxmlformats.org/drawingml/2006/main" noGrp="1"/>
+          </p:cNvSpPr>
+          <p:nvPr/>
+        </p:nvSpPr>
+        <p:spPr>
+          <a:xfrm xmlns:a="http://schemas.openxmlformats.org/drawingml/2006/main">
+            <a:off x="8839200" y="2952750"/>
+            <a:ext cx="2190750" cy="2190750"/>
+          </a:xfrm>
+          <a:prstGeom xmlns:a="http://schemas.openxmlformats.org/drawingml/2006/main" prst="ellipse">
+            <a:avLst/>
+          </a:prstGeom>
+          <a:solidFill xmlns:a="http://schemas.openxmlformats.org/drawingml/2006/main">
+            <a:srgbClr val="FFF4D6"/>
+          </a:solidFill>
+          <a:ln xmlns:a="http://schemas.openxmlformats.org/drawingml/2006/main" w="0">
+            <a:noFill/>
+          </a:ln>
+        </p:spPr>
+      </p:sp>
+      <p:sp>
+        <p:nvSpPr>
+          <p:cNvPr id="3" name="">
+            <a:extLst xmlns:a="http://schemas.openxmlformats.org/drawingml/2006/main">
+              <a:ext uri="{FF2B5EF4-FFF2-40B4-BE49-F238E27FC236}">
+                <a16:creationId xmlns:a16="http://schemas.microsoft.com/office/drawing/2014/main" id="{2B5D4F4A-2913-4853-AF7F-2C0769090764}"/>
+              </a:ext>
+            </a:extLst>
+          </p:cNvPr>
+          <p:cNvSpPr>
+            <a:spLocks xmlns:a="http://schemas.openxmlformats.org/drawingml/2006/main" noGrp="1"/>
+          </p:cNvSpPr>
+          <p:nvPr/>
+        </p:nvSpPr>
+        <p:spPr>
+          <a:xfrm xmlns:a="http://schemas.openxmlformats.org/drawingml/2006/main">
+            <a:off x="838200" y="2362200"/>
+            <a:ext cx="5048250" cy="857250"/>
+          </a:xfrm>
+          <a:prstGeom xmlns:a="http://schemas.openxmlformats.org/drawingml/2006/main" prst="rect">
+            <a:avLst/>
+          </a:prstGeom>
+          <a:noFill xmlns:a="http://schemas.openxmlformats.org/drawingml/2006/main"/>
+          <a:ln xmlns:a="http://schemas.openxmlformats.org/drawingml/2006/main" w="0">
+            <a:noFill/>
+          </a:ln>
+        </p:spPr>
+        <p:txBody>
+          <a:bodyPr xmlns:a="http://schemas.openxmlformats.org/drawingml/2006/main" lIns="0" tIns="0" rIns="0" bIns="0" anchor="ctr">
+            <a:normAutofit fontScale="100000"/>
+          </a:bodyPr>
+          <a:lstStyle xmlns:a="http://schemas.openxmlformats.org/drawingml/2006/main"/>
+          <a:p xmlns:a="http://schemas.openxmlformats.org/drawingml/2006/main">
+            <a:pPr algn="l">
+              <a:buNone/>
+              <a:defRPr sz="4500" b="1">
+                <a:solidFill>
+                  <a:srgbClr val="17344D"/>
+                </a:solidFill>
+                <a:latin typeface="Noto Sans TC"/>
+                <a:ea typeface="Noto Sans TC"/>
+                <a:cs typeface="Noto Sans TC"/>
+              </a:defRPr>
+            </a:pPr>
+            <a:r>
+              <a:rPr sz="4500" b="1">
+                <a:solidFill>
+                  <a:srgbClr val="17344D"/>
+                </a:solidFill>
+                <a:latin typeface="Noto Sans TC"/>
+                <a:ea typeface="Noto Sans TC"/>
+                <a:cs typeface="Noto Sans TC"/>
+              </a:rPr>
+              <a:t>Q&amp;A</a:t>
+            </a:r>
+          </a:p>
+        </p:txBody>
+      </p:sp>
+      <p:sp>
+        <p:nvSpPr>
+          <p:cNvPr id="4" name="">
+            <a:extLst xmlns:a="http://schemas.openxmlformats.org/drawingml/2006/main">
+              <a:ext uri="{FF2B5EF4-FFF2-40B4-BE49-F238E27FC236}">
+                <a16:creationId xmlns:a16="http://schemas.microsoft.com/office/drawing/2014/main" id="{E25676B2-1A3E-406F-A3D5-1F0443EB2177}"/>
+              </a:ext>
+            </a:extLst>
+          </p:cNvPr>
+          <p:cNvSpPr>
+            <a:spLocks xmlns:a="http://schemas.openxmlformats.org/drawingml/2006/main" noGrp="1"/>
+          </p:cNvSpPr>
+          <p:nvPr/>
+        </p:nvSpPr>
+        <p:spPr>
+          <a:xfrm xmlns:a="http://schemas.openxmlformats.org/drawingml/2006/main">
+            <a:off x="895350" y="3429000"/>
+            <a:ext cx="3333750" cy="419100"/>
+          </a:xfrm>
+          <a:prstGeom xmlns:a="http://schemas.openxmlformats.org/drawingml/2006/main" prst="rect">
+            <a:avLst/>
+          </a:prstGeom>
+          <a:noFill xmlns:a="http://schemas.openxmlformats.org/drawingml/2006/main"/>
+          <a:ln xmlns:a="http://schemas.openxmlformats.org/drawingml/2006/main" w="0">
+            <a:noFill/>
+          </a:ln>
+        </p:spPr>
+        <p:txBody>
+          <a:bodyPr xmlns:a="http://schemas.openxmlformats.org/drawingml/2006/main" lIns="0" tIns="0" rIns="0" bIns="0" anchor="ctr">
+            <a:normAutofit fontScale="100000"/>
+          </a:bodyPr>
+          <a:lstStyle xmlns:a="http://schemas.openxmlformats.org/drawingml/2006/main"/>
+          <a:p xmlns:a="http://schemas.openxmlformats.org/drawingml/2006/main">
+            <a:pPr algn="l">
+              <a:buNone/>
+              <a:defRPr sz="2100" b="1">
+                <a:solidFill>
+                  <a:srgbClr val="2F9BD3"/>
+                </a:solidFill>
+                <a:latin typeface="Noto Sans TC"/>
+                <a:ea typeface="Noto Sans TC"/>
+                <a:cs typeface="Noto Sans TC"/>
+              </a:defRPr>
+            </a:pPr>
+            <a:r>
+              <a:rPr sz="2100" b="1">
+                <a:solidFill>
+                  <a:srgbClr val="2F9BD3"/>
+                </a:solidFill>
+                <a:latin typeface="Noto Sans TC"/>
+                <a:ea typeface="Noto Sans TC"/>
+                <a:cs typeface="Noto Sans TC"/>
+              </a:rPr>
+              <a:t>謝謝聆聽</a:t>
+            </a:r>
+          </a:p>
+        </p:txBody>
+      </p:sp>
+      <p:sp>
+        <p:nvSpPr>
+          <p:cNvPr id="5" name="">
+            <a:extLst xmlns:a="http://schemas.openxmlformats.org/drawingml/2006/main">
+              <a:ext uri="{FF2B5EF4-FFF2-40B4-BE49-F238E27FC236}">
+                <a16:creationId xmlns:a16="http://schemas.microsoft.com/office/drawing/2014/main" id="{5369E26F-E081-4236-A043-91EB548EAC6A}"/>
+              </a:ext>
+            </a:extLst>
+          </p:cNvPr>
+          <p:cNvSpPr>
+            <a:spLocks xmlns:a="http://schemas.openxmlformats.org/drawingml/2006/main" noGrp="1"/>
+          </p:cNvSpPr>
+          <p:nvPr/>
+        </p:nvSpPr>
+        <p:spPr>
+          <a:xfrm xmlns:a="http://schemas.openxmlformats.org/drawingml/2006/main">
+            <a:off x="895350" y="4829175"/>
+            <a:ext cx="4000500" cy="285750"/>
+          </a:xfrm>
+          <a:prstGeom xmlns:a="http://schemas.openxmlformats.org/drawingml/2006/main" prst="rect">
+            <a:avLst/>
+          </a:prstGeom>
+          <a:noFill xmlns:a="http://schemas.openxmlformats.org/drawingml/2006/main"/>
+          <a:ln xmlns:a="http://schemas.openxmlformats.org/drawingml/2006/main" w="0">
+            <a:noFill/>
+          </a:ln>
+        </p:spPr>
+        <p:txBody>
+          <a:bodyPr xmlns:a="http://schemas.openxmlformats.org/drawingml/2006/main" lIns="0" tIns="0" rIns="0" bIns="0" anchor="ctr">
+            <a:normAutofit fontScale="100000"/>
+          </a:bodyPr>
+          <a:lstStyle xmlns:a="http://schemas.openxmlformats.org/drawingml/2006/main"/>
+          <a:p xmlns:a="http://schemas.openxmlformats.org/drawingml/2006/main">
+            <a:pPr algn="l">
+              <a:buNone/>
+              <a:defRPr sz="1350" b="0">
+                <a:solidFill>
+                  <a:srgbClr val="657784"/>
+                </a:solidFill>
+                <a:latin typeface="Noto Sans TC"/>
+                <a:ea typeface="Noto Sans TC"/>
+                <a:cs typeface="Noto Sans TC"/>
+              </a:defRPr>
+            </a:pPr>
+            <a:r>
+              <a:rPr sz="1350" b="0">
+                <a:solidFill>
+                  <a:srgbClr val="657784"/>
+                </a:solidFill>
+                <a:latin typeface="Noto Sans TC"/>
+                <a:ea typeface="Noto Sans TC"/>
+                <a:cs typeface="Noto Sans TC"/>
+              </a:rPr>
+              <a:t>小鳥過馬路  Traffic Bird</a:t>
+            </a:r>
+          </a:p>
+        </p:txBody>
+      </p:sp>
+      <p:sp>
+        <p:nvSpPr>
+          <p:cNvPr id="6" name="">
+            <a:extLst xmlns:a="http://schemas.openxmlformats.org/drawingml/2006/main">
+              <a:ext uri="{FF2B5EF4-FFF2-40B4-BE49-F238E27FC236}">
+                <a16:creationId xmlns:a16="http://schemas.microsoft.com/office/drawing/2014/main" id="{A901D731-4E9C-4A3D-846C-51EC7E0EA35E}"/>
+              </a:ext>
+            </a:extLst>
+          </p:cNvPr>
+          <p:cNvSpPr>
+            <a:spLocks xmlns:a="http://schemas.openxmlformats.org/drawingml/2006/main" noGrp="1"/>
+          </p:cNvSpPr>
+          <p:nvPr/>
+        </p:nvSpPr>
+        <p:spPr>
+          <a:xfrm xmlns:a="http://schemas.openxmlformats.org/drawingml/2006/main">
+            <a:off x="723900" y="6362700"/>
+            <a:ext cx="10744200" cy="0"/>
+          </a:xfrm>
+          <a:prstGeom xmlns:a="http://schemas.openxmlformats.org/drawingml/2006/main" prst="line">
+            <a:avLst/>
+          </a:prstGeom>
+          <a:noFill xmlns:a="http://schemas.openxmlformats.org/drawingml/2006/main"/>
+          <a:ln xmlns:a="http://schemas.openxmlformats.org/drawingml/2006/main" w="9525">
+            <a:solidFill>
+              <a:srgbClr val="D7E5E8"/>
+            </a:solidFill>
+            <a:prstDash val="solid"/>
+          </a:ln>
+        </p:spPr>
+      </p:sp>
+      <p:sp>
+        <p:nvSpPr>
+          <p:cNvPr id="7" name="">
+            <a:extLst xmlns:a="http://schemas.openxmlformats.org/drawingml/2006/main">
+              <a:ext uri="{FF2B5EF4-FFF2-40B4-BE49-F238E27FC236}">
+                <a16:creationId xmlns:a16="http://schemas.microsoft.com/office/drawing/2014/main" id="{E9FBC5FE-98E3-4D5C-9CCF-38E33572D564}"/>
+              </a:ext>
+            </a:extLst>
+          </p:cNvPr>
+          <p:cNvSpPr>
+            <a:spLocks xmlns:a="http://schemas.openxmlformats.org/drawingml/2006/main" noGrp="1"/>
+          </p:cNvSpPr>
+          <p:nvPr/>
+        </p:nvSpPr>
+        <p:spPr>
+          <a:xfrm xmlns:a="http://schemas.openxmlformats.org/drawingml/2006/main">
+            <a:off x="723900" y="6467475"/>
+            <a:ext cx="4762500" cy="171450"/>
+          </a:xfrm>
+          <a:prstGeom xmlns:a="http://schemas.openxmlformats.org/drawingml/2006/main" prst="rect">
+            <a:avLst/>
+          </a:prstGeom>
+          <a:noFill xmlns:a="http://schemas.openxmlformats.org/drawingml/2006/main"/>
+          <a:ln xmlns:a="http://schemas.openxmlformats.org/drawingml/2006/main" w="0">
+            <a:noFill/>
+          </a:ln>
+        </p:spPr>
+        <p:txBody>
+          <a:bodyPr xmlns:a="http://schemas.openxmlformats.org/drawingml/2006/main" lIns="0" tIns="0" rIns="0" bIns="0" anchor="ctr">
+            <a:normAutofit fontScale="100000"/>
+          </a:bodyPr>
+          <a:lstStyle xmlns:a="http://schemas.openxmlformats.org/drawingml/2006/main"/>
+          <a:p xmlns:a="http://schemas.openxmlformats.org/drawingml/2006/main">
+            <a:pPr algn="l">
+              <a:buNone/>
+              <a:defRPr sz="825" b="0">
+                <a:solidFill>
+                  <a:srgbClr val="657784"/>
+                </a:solidFill>
+                <a:latin typeface="Noto Sans TC"/>
+                <a:ea typeface="Noto Sans TC"/>
+                <a:cs typeface="Noto Sans TC"/>
+              </a:defRPr>
+            </a:pPr>
+            <a:r>
+              <a:rPr sz="825" b="0">
+                <a:solidFill>
+                  <a:srgbClr val="657784"/>
+                </a:solidFill>
+                <a:latin typeface="Noto Sans TC"/>
+                <a:ea typeface="Noto Sans TC"/>
+                <a:cs typeface="Noto Sans TC"/>
+              </a:rPr>
+              <a:t>Traffic Bird｜5 人多人派對玩法擴充提案</a:t>
+            </a:r>
+          </a:p>
+        </p:txBody>
+      </p:sp>
+      <p:sp>
+        <p:nvSpPr>
+          <p:cNvPr id="8" name="">
+            <a:extLst xmlns:a="http://schemas.openxmlformats.org/drawingml/2006/main">
+              <a:ext uri="{FF2B5EF4-FFF2-40B4-BE49-F238E27FC236}">
+                <a16:creationId xmlns:a16="http://schemas.microsoft.com/office/drawing/2014/main" id="{DFEF1C22-E1DC-44E7-A2E8-566B09793989}"/>
+              </a:ext>
+            </a:extLst>
+          </p:cNvPr>
+          <p:cNvSpPr>
+            <a:spLocks xmlns:a="http://schemas.openxmlformats.org/drawingml/2006/main" noGrp="1"/>
+          </p:cNvSpPr>
+          <p:nvPr/>
+        </p:nvSpPr>
+        <p:spPr>
+          <a:xfrm xmlns:a="http://schemas.openxmlformats.org/drawingml/2006/main">
+            <a:off x="10953750" y="6467475"/>
+            <a:ext cx="514350" cy="171450"/>
+          </a:xfrm>
+          <a:prstGeom xmlns:a="http://schemas.openxmlformats.org/drawingml/2006/main" prst="rect">
+            <a:avLst/>
+          </a:prstGeom>
+          <a:noFill xmlns:a="http://schemas.openxmlformats.org/drawingml/2006/main"/>
+          <a:ln xmlns:a="http://schemas.openxmlformats.org/drawingml/2006/main" w="0">
+            <a:noFill/>
+          </a:ln>
+        </p:spPr>
+        <p:txBody>
+          <a:bodyPr xmlns:a="http://schemas.openxmlformats.org/drawingml/2006/main" lIns="0" tIns="0" rIns="0" bIns="0" anchor="ctr">
+            <a:normAutofit fontScale="100000"/>
+          </a:bodyPr>
+          <a:lstStyle xmlns:a="http://schemas.openxmlformats.org/drawingml/2006/main"/>
+          <a:p xmlns:a="http://schemas.openxmlformats.org/drawingml/2006/main">
+            <a:pPr algn="r">
+              <a:buNone/>
+              <a:defRPr sz="825" b="0">
+                <a:solidFill>
+                  <a:srgbClr val="657784"/>
+                </a:solidFill>
+                <a:latin typeface="Noto Sans TC"/>
+                <a:ea typeface="Noto Sans TC"/>
+                <a:cs typeface="Noto Sans TC"/>
+              </a:defRPr>
+            </a:pPr>
+            <a:r>
+              <a:rPr sz="825" b="0">
+                <a:solidFill>
+                  <a:srgbClr val="657784"/>
+                </a:solidFill>
+                <a:latin typeface="Noto Sans TC"/>
+                <a:ea typeface="Noto Sans TC"/>
+                <a:cs typeface="Noto Sans TC"/>
+              </a:rPr>
+              <a:t>9</a:t>
             </a:r>
           </a:p>
         </p:txBody>
